--- a/ex13/ISAM.pptx
+++ b/ex13/ISAM.pptx
@@ -2523,6 +2523,33 @@
               <a:t/>
             </a:r>
             <a:endParaRPr lang="en-US" dirty="0"/>
+          </a:p>
+          <a:p>
+            <a:r>
+              <a:rPr lang="en-US"/>
+              <a:t>This example matches the three-leaf build on slide 9. Block 0 holds root=4. Following this value opens the separator page in block 4. That page contains keys 341 and 681 and child pointers P0=1, P1=2, P2=3. Each pointer names a child block.</a:t>
+            </a:r>
+          </a:p>
+          <a:p>
+            <a:r>
+              <a:rPr lang="en-US"/>
+              <a:t>The root is separate from the header. With n separator keys, a separator page has n+1 child pointers. The displayed slot order explains routing. Slide 6 shows the physical byte layout, which stores P0 after the entry array.</a:t>
+            </a:r>
+          </a:p>
+          <a:p>
+            <a:r>
+              <a:rPr lang="en-US"/>
+              <a:t>Header type widths: integers use 4 bytes, doubles use 8 bytes, and strings use their declared width. Table and column names use lengths followed by bytes. The header limits table names to 200 bytes.</a:t>
+            </a:r>
+          </a:p>
+          <a:p>
+            <a:r>
+              <a:rPr lang="en-US"/>
+              <a:t>The file identifies itself: magic, key type and width, table and column names
+open() validates all of it against the bound schema before use
+write_header() runs after every insert — the entry count and last block move
+A deleted index file is a lazy rebuild, not an error — the catalog says what should exist</a:t>
+            </a:r>
           </a:p>
         </p:txBody>
       </p:sp>
@@ -8391,8 +8418,8 @@
         </p:nvSpPr>
         <p:spPr>
           <a:xfrm>
-            <a:off x="5806440" y="1645920"/>
-            <a:ext cx="1371600" cy="411480"/>
+            <a:off x="4434840" y="1518920"/>
+            <a:ext cx="3493776" cy="511810"/>
           </a:xfrm>
           <a:prstGeom prst="roundRect">
             <a:avLst>
@@ -8416,7 +8443,7 @@
               <a:buNone/>
             </a:pPr>
             <a:r>
-              <a:rPr lang="en-US" sz="1150" dirty="0">
+              <a:rPr lang="en-US" sz="1050" b="1" dirty="0">
                 <a:solidFill>
                   <a:srgbClr val="000000"/>
                 </a:solidFill>
@@ -8424,9 +8451,26 @@
                 <a:ea typeface="Calibri" pitchFamily="34" charset="-122"/>
                 <a:cs typeface="Calibri" pitchFamily="34" charset="-120"/>
               </a:rPr>
-              <a:t>root</a:t>
-            </a:r>
-            <a:endParaRPr lang="en-US" sz="1150" dirty="0"/>
+              <a:t>root separator</a:t>
+            </a:r>
+            <a:endParaRPr lang="en-US" sz="1050" dirty="0"/>
+          </a:p>
+          <a:p>
+            <a:pPr algn="ctr" indent="0" marL="0">
+              <a:buNone/>
+            </a:pPr>
+            <a:r>
+              <a:rPr lang="en-US" sz="900" dirty="0">
+                <a:solidFill>
+                  <a:srgbClr val="2F5597"/>
+                </a:solidFill>
+                <a:latin typeface="Calibri" pitchFamily="34" charset="0"/>
+                <a:ea typeface="Calibri" pitchFamily="34" charset="-122"/>
+                <a:cs typeface="Calibri" pitchFamily="34" charset="-120"/>
+              </a:rPr>
+              <a:t>P0 | 341 | P1 | 681 | P2</a:t>
+            </a:r>
+            <a:endParaRPr lang="en-US" sz="900" dirty="0"/>
           </a:p>
         </p:txBody>
       </p:sp>
@@ -14694,7 +14738,7 @@
                 <a:ea typeface="Calibri" pitchFamily="34" charset="-122"/>
                 <a:cs typeface="Calibri" pitchFamily="34" charset="-120"/>
               </a:rPr>
-              <a:t>How 1124 checks — and a differential oracle — prove the design</a:t>
+              <a:t>How 1175 checks — and a differential oracle — prove the design</a:t>
             </a:r>
             <a:endParaRPr lang="en-US" sz="1600" dirty="0"/>
           </a:p>
@@ -20506,7 +20550,7 @@
                 <a:ea typeface="Calibri" pitchFamily="34" charset="-122"/>
                 <a:cs typeface="Calibri" pitchFamily="34" charset="-120"/>
               </a:rPr>
-              <a:t>all 1124 checks pass; public API untouched</a:t>
+              <a:t>all 1175 checks pass; public API untouched</a:t>
             </a:r>
             <a:endParaRPr lang="en-US" sz="1050" dirty="0"/>
           </a:p>
@@ -21171,7 +21215,7 @@
                 <a:ea typeface="Calibri" pitchFamily="34" charset="-122"/>
                 <a:cs typeface="Calibri" pitchFamily="34" charset="-120"/>
               </a:rPr>
-              <a:t>1124</a:t>
+              <a:t>1175</a:t>
             </a:r>
             <a:endParaRPr lang="en-US" sz="4400" dirty="0"/>
           </a:p>
@@ -21210,7 +21254,7 @@
                 <a:ea typeface="Calibri" pitchFamily="34" charset="-122"/>
                 <a:cs typeface="Calibri" pitchFamily="34" charset="-120"/>
               </a:rPr>
-              <a:t>checks across four suites</a:t>
+              <a:t>checks across five suites</a:t>
             </a:r>
             <a:endParaRPr lang="en-US" sz="1300" dirty="0"/>
           </a:p>
@@ -22737,693 +22781,6 @@
       </p:sp>
       <p:sp>
         <p:nvSpPr>
-          <p:cNvPr id="3" name="Text 1"/>
-          <p:cNvSpPr/>
-          <p:nvPr/>
-        </p:nvSpPr>
-        <p:spPr>
-          <a:xfrm>
-            <a:off x="5349240" y="1554480"/>
-            <a:ext cx="1737360" cy="457200"/>
-          </a:xfrm>
-          <a:prstGeom prst="roundRect">
-            <a:avLst>
-              <a:gd name="adj" fmla="val 8000"/>
-            </a:avLst>
-          </a:prstGeom>
-          <a:solidFill>
-            <a:srgbClr val="DAE3F3"/>
-          </a:solidFill>
-          <a:ln w="15875">
-            <a:solidFill>
-              <a:srgbClr val="2F5597"/>
-            </a:solidFill>
-          </a:ln>
-        </p:spPr>
-        <p:txBody>
-          <a:bodyPr wrap="square" lIns="254" tIns="254" rIns="254" bIns="254" rtlCol="0" anchor="ctr"/>
-          <a:lstStyle/>
-          <a:p>
-            <a:pPr algn="ctr" indent="0" marL="0">
-              <a:buNone/>
-            </a:pPr>
-            <a:r>
-              <a:rPr lang="en-US" sz="1200" dirty="0">
-                <a:solidFill>
-                  <a:srgbClr val="000000"/>
-                </a:solidFill>
-                <a:latin typeface="Calibri" pitchFamily="34" charset="0"/>
-                <a:ea typeface="Calibri" pitchFamily="34" charset="-122"/>
-                <a:cs typeface="Calibri" pitchFamily="34" charset="-120"/>
-              </a:rPr>
-              <a:t>root separator</a:t>
-            </a:r>
-            <a:endParaRPr lang="en-US" sz="1200" dirty="0"/>
-          </a:p>
-        </p:txBody>
-      </p:sp>
-      <p:sp>
-        <p:nvSpPr>
-          <p:cNvPr id="4" name="Text 2"/>
-          <p:cNvSpPr/>
-          <p:nvPr/>
-        </p:nvSpPr>
-        <p:spPr>
-          <a:xfrm>
-            <a:off x="3977640" y="2514600"/>
-            <a:ext cx="1737360" cy="457200"/>
-          </a:xfrm>
-          <a:prstGeom prst="roundRect">
-            <a:avLst>
-              <a:gd name="adj" fmla="val 8000"/>
-            </a:avLst>
-          </a:prstGeom>
-          <a:solidFill>
-            <a:srgbClr val="DAE3F3"/>
-          </a:solidFill>
-          <a:ln w="15875">
-            <a:solidFill>
-              <a:srgbClr val="2F5597"/>
-            </a:solidFill>
-          </a:ln>
-        </p:spPr>
-        <p:txBody>
-          <a:bodyPr wrap="square" lIns="254" tIns="254" rIns="254" bIns="254" rtlCol="0" anchor="ctr"/>
-          <a:lstStyle/>
-          <a:p>
-            <a:pPr algn="ctr" indent="0" marL="0">
-              <a:buNone/>
-            </a:pPr>
-            <a:r>
-              <a:rPr lang="en-US" sz="1200" dirty="0">
-                <a:solidFill>
-                  <a:srgbClr val="000000"/>
-                </a:solidFill>
-                <a:latin typeface="Calibri" pitchFamily="34" charset="0"/>
-                <a:ea typeface="Calibri" pitchFamily="34" charset="-122"/>
-                <a:cs typeface="Calibri" pitchFamily="34" charset="-120"/>
-              </a:rPr>
-              <a:t>separator</a:t>
-            </a:r>
-            <a:endParaRPr lang="en-US" sz="1200" dirty="0"/>
-          </a:p>
-        </p:txBody>
-      </p:sp>
-      <p:sp>
-        <p:nvSpPr>
-          <p:cNvPr id="5" name="Text 3"/>
-          <p:cNvSpPr/>
-          <p:nvPr/>
-        </p:nvSpPr>
-        <p:spPr>
-          <a:xfrm>
-            <a:off x="7178040" y="2514600"/>
-            <a:ext cx="1737360" cy="457200"/>
-          </a:xfrm>
-          <a:prstGeom prst="roundRect">
-            <a:avLst>
-              <a:gd name="adj" fmla="val 8000"/>
-            </a:avLst>
-          </a:prstGeom>
-          <a:solidFill>
-            <a:srgbClr val="DAE3F3"/>
-          </a:solidFill>
-          <a:ln w="15875">
-            <a:solidFill>
-              <a:srgbClr val="2F5597"/>
-            </a:solidFill>
-          </a:ln>
-        </p:spPr>
-        <p:txBody>
-          <a:bodyPr wrap="square" lIns="254" tIns="254" rIns="254" bIns="254" rtlCol="0" anchor="ctr"/>
-          <a:lstStyle/>
-          <a:p>
-            <a:pPr algn="ctr" indent="0" marL="0">
-              <a:buNone/>
-            </a:pPr>
-            <a:r>
-              <a:rPr lang="en-US" sz="1200" dirty="0">
-                <a:solidFill>
-                  <a:srgbClr val="000000"/>
-                </a:solidFill>
-                <a:latin typeface="Calibri" pitchFamily="34" charset="0"/>
-                <a:ea typeface="Calibri" pitchFamily="34" charset="-122"/>
-                <a:cs typeface="Calibri" pitchFamily="34" charset="-120"/>
-              </a:rPr>
-              <a:t>separator</a:t>
-            </a:r>
-            <a:endParaRPr lang="en-US" sz="1200" dirty="0"/>
-          </a:p>
-        </p:txBody>
-      </p:sp>
-      <p:sp>
-        <p:nvSpPr>
-          <p:cNvPr id="6" name="Text 4"/>
-          <p:cNvSpPr/>
-          <p:nvPr/>
-        </p:nvSpPr>
-        <p:spPr>
-          <a:xfrm>
-            <a:off x="2697480" y="3520440"/>
-            <a:ext cx="1737360" cy="457200"/>
-          </a:xfrm>
-          <a:prstGeom prst="roundRect">
-            <a:avLst>
-              <a:gd name="adj" fmla="val 8000"/>
-            </a:avLst>
-          </a:prstGeom>
-          <a:solidFill>
-            <a:srgbClr val="FBE5D6"/>
-          </a:solidFill>
-          <a:ln w="15875">
-            <a:solidFill>
-              <a:srgbClr val="C55A11"/>
-            </a:solidFill>
-          </a:ln>
-        </p:spPr>
-        <p:txBody>
-          <a:bodyPr wrap="square" lIns="254" tIns="254" rIns="254" bIns="254" rtlCol="0" anchor="ctr"/>
-          <a:lstStyle/>
-          <a:p>
-            <a:pPr algn="ctr" indent="0" marL="0">
-              <a:buNone/>
-            </a:pPr>
-            <a:r>
-              <a:rPr lang="en-US" sz="1200" dirty="0">
-                <a:solidFill>
-                  <a:srgbClr val="000000"/>
-                </a:solidFill>
-                <a:latin typeface="Calibri" pitchFamily="34" charset="0"/>
-                <a:ea typeface="Calibri" pitchFamily="34" charset="-122"/>
-                <a:cs typeface="Calibri" pitchFamily="34" charset="-120"/>
-              </a:rPr>
-              <a:t>L1</a:t>
-            </a:r>
-            <a:endParaRPr lang="en-US" sz="1200" dirty="0"/>
-          </a:p>
-        </p:txBody>
-      </p:sp>
-      <p:sp>
-        <p:nvSpPr>
-          <p:cNvPr id="7" name="Text 5"/>
-          <p:cNvSpPr/>
-          <p:nvPr/>
-        </p:nvSpPr>
-        <p:spPr>
-          <a:xfrm>
-            <a:off x="4754880" y="3520440"/>
-            <a:ext cx="1737360" cy="457200"/>
-          </a:xfrm>
-          <a:prstGeom prst="roundRect">
-            <a:avLst>
-              <a:gd name="adj" fmla="val 8000"/>
-            </a:avLst>
-          </a:prstGeom>
-          <a:solidFill>
-            <a:srgbClr val="FBE5D6"/>
-          </a:solidFill>
-          <a:ln w="15875">
-            <a:solidFill>
-              <a:srgbClr val="C55A11"/>
-            </a:solidFill>
-          </a:ln>
-        </p:spPr>
-        <p:txBody>
-          <a:bodyPr wrap="square" lIns="254" tIns="254" rIns="254" bIns="254" rtlCol="0" anchor="ctr"/>
-          <a:lstStyle/>
-          <a:p>
-            <a:pPr algn="ctr" indent="0" marL="0">
-              <a:buNone/>
-            </a:pPr>
-            <a:r>
-              <a:rPr lang="en-US" sz="1200" dirty="0">
-                <a:solidFill>
-                  <a:srgbClr val="000000"/>
-                </a:solidFill>
-                <a:latin typeface="Calibri" pitchFamily="34" charset="0"/>
-                <a:ea typeface="Calibri" pitchFamily="34" charset="-122"/>
-                <a:cs typeface="Calibri" pitchFamily="34" charset="-120"/>
-              </a:rPr>
-              <a:t>L2</a:t>
-            </a:r>
-            <a:endParaRPr lang="en-US" sz="1200" dirty="0"/>
-          </a:p>
-        </p:txBody>
-      </p:sp>
-      <p:sp>
-        <p:nvSpPr>
-          <p:cNvPr id="8" name="Text 6"/>
-          <p:cNvSpPr/>
-          <p:nvPr/>
-        </p:nvSpPr>
-        <p:spPr>
-          <a:xfrm>
-            <a:off x="6812280" y="3520440"/>
-            <a:ext cx="1737360" cy="457200"/>
-          </a:xfrm>
-          <a:prstGeom prst="roundRect">
-            <a:avLst>
-              <a:gd name="adj" fmla="val 8000"/>
-            </a:avLst>
-          </a:prstGeom>
-          <a:solidFill>
-            <a:srgbClr val="FBE5D6"/>
-          </a:solidFill>
-          <a:ln w="15875">
-            <a:solidFill>
-              <a:srgbClr val="C55A11"/>
-            </a:solidFill>
-          </a:ln>
-        </p:spPr>
-        <p:txBody>
-          <a:bodyPr wrap="square" lIns="254" tIns="254" rIns="254" bIns="254" rtlCol="0" anchor="ctr"/>
-          <a:lstStyle/>
-          <a:p>
-            <a:pPr algn="ctr" indent="0" marL="0">
-              <a:buNone/>
-            </a:pPr>
-            <a:r>
-              <a:rPr lang="en-US" sz="1200" dirty="0">
-                <a:solidFill>
-                  <a:srgbClr val="000000"/>
-                </a:solidFill>
-                <a:latin typeface="Calibri" pitchFamily="34" charset="0"/>
-                <a:ea typeface="Calibri" pitchFamily="34" charset="-122"/>
-                <a:cs typeface="Calibri" pitchFamily="34" charset="-120"/>
-              </a:rPr>
-              <a:t>L3</a:t>
-            </a:r>
-            <a:endParaRPr lang="en-US" sz="1200" dirty="0"/>
-          </a:p>
-        </p:txBody>
-      </p:sp>
-      <p:sp>
-        <p:nvSpPr>
-          <p:cNvPr id="9" name="Text 7"/>
-          <p:cNvSpPr/>
-          <p:nvPr/>
-        </p:nvSpPr>
-        <p:spPr>
-          <a:xfrm>
-            <a:off x="8869680" y="3520440"/>
-            <a:ext cx="1737360" cy="457200"/>
-          </a:xfrm>
-          <a:prstGeom prst="roundRect">
-            <a:avLst>
-              <a:gd name="adj" fmla="val 8000"/>
-            </a:avLst>
-          </a:prstGeom>
-          <a:solidFill>
-            <a:srgbClr val="FBE5D6"/>
-          </a:solidFill>
-          <a:ln w="15875">
-            <a:solidFill>
-              <a:srgbClr val="C55A11"/>
-            </a:solidFill>
-          </a:ln>
-        </p:spPr>
-        <p:txBody>
-          <a:bodyPr wrap="square" lIns="254" tIns="254" rIns="254" bIns="254" rtlCol="0" anchor="ctr"/>
-          <a:lstStyle/>
-          <a:p>
-            <a:pPr algn="ctr" indent="0" marL="0">
-              <a:buNone/>
-            </a:pPr>
-            <a:r>
-              <a:rPr lang="en-US" sz="1200" dirty="0">
-                <a:solidFill>
-                  <a:srgbClr val="000000"/>
-                </a:solidFill>
-                <a:latin typeface="Calibri" pitchFamily="34" charset="0"/>
-                <a:ea typeface="Calibri" pitchFamily="34" charset="-122"/>
-                <a:cs typeface="Calibri" pitchFamily="34" charset="-120"/>
-              </a:rPr>
-              <a:t>L4</a:t>
-            </a:r>
-            <a:endParaRPr lang="en-US" sz="1200" dirty="0"/>
-          </a:p>
-        </p:txBody>
-      </p:sp>
-      <p:sp>
-        <p:nvSpPr>
-          <p:cNvPr id="10" name="Shape 8"/>
-          <p:cNvSpPr/>
-          <p:nvPr/>
-        </p:nvSpPr>
-        <p:spPr>
-          <a:xfrm flipH="1">
-            <a:off x="4892040" y="2011680"/>
-            <a:ext cx="960120" cy="502920"/>
-          </a:xfrm>
-          <a:prstGeom prst="line">
-            <a:avLst/>
-          </a:prstGeom>
-          <a:noFill/>
-          <a:ln w="22225">
-            <a:solidFill>
-              <a:srgbClr val="2F5597"/>
-            </a:solidFill>
-            <a:prstDash val="solid"/>
-            <a:tailEnd type="triangle"/>
-          </a:ln>
-        </p:spPr>
-      </p:sp>
-      <p:sp>
-        <p:nvSpPr>
-          <p:cNvPr id="11" name="Shape 9"/>
-          <p:cNvSpPr/>
-          <p:nvPr/>
-        </p:nvSpPr>
-        <p:spPr>
-          <a:xfrm>
-            <a:off x="6583680" y="2011680"/>
-            <a:ext cx="1417320" cy="502920"/>
-          </a:xfrm>
-          <a:prstGeom prst="line">
-            <a:avLst/>
-          </a:prstGeom>
-          <a:noFill/>
-          <a:ln w="22225">
-            <a:solidFill>
-              <a:srgbClr val="2F5597"/>
-            </a:solidFill>
-            <a:prstDash val="solid"/>
-            <a:tailEnd type="triangle"/>
-          </a:ln>
-        </p:spPr>
-      </p:sp>
-      <p:sp>
-        <p:nvSpPr>
-          <p:cNvPr id="12" name="Shape 10"/>
-          <p:cNvSpPr/>
-          <p:nvPr/>
-        </p:nvSpPr>
-        <p:spPr>
-          <a:xfrm flipH="1">
-            <a:off x="3611880" y="2971800"/>
-            <a:ext cx="868680" cy="548640"/>
-          </a:xfrm>
-          <a:prstGeom prst="line">
-            <a:avLst/>
-          </a:prstGeom>
-          <a:noFill/>
-          <a:ln w="19050">
-            <a:solidFill>
-              <a:srgbClr val="2F5597"/>
-            </a:solidFill>
-            <a:prstDash val="solid"/>
-            <a:tailEnd type="triangle"/>
-          </a:ln>
-        </p:spPr>
-      </p:sp>
-      <p:sp>
-        <p:nvSpPr>
-          <p:cNvPr id="13" name="Shape 11"/>
-          <p:cNvSpPr/>
-          <p:nvPr/>
-        </p:nvSpPr>
-        <p:spPr>
-          <a:xfrm>
-            <a:off x="5212080" y="2971800"/>
-            <a:ext cx="365760" cy="548640"/>
-          </a:xfrm>
-          <a:prstGeom prst="line">
-            <a:avLst/>
-          </a:prstGeom>
-          <a:noFill/>
-          <a:ln w="19050">
-            <a:solidFill>
-              <a:srgbClr val="2F5597"/>
-            </a:solidFill>
-            <a:prstDash val="solid"/>
-            <a:tailEnd type="triangle"/>
-          </a:ln>
-        </p:spPr>
-      </p:sp>
-      <p:sp>
-        <p:nvSpPr>
-          <p:cNvPr id="14" name="Shape 12"/>
-          <p:cNvSpPr/>
-          <p:nvPr/>
-        </p:nvSpPr>
-        <p:spPr>
-          <a:xfrm flipH="1">
-            <a:off x="7635240" y="2971800"/>
-            <a:ext cx="45720" cy="548640"/>
-          </a:xfrm>
-          <a:prstGeom prst="line">
-            <a:avLst/>
-          </a:prstGeom>
-          <a:noFill/>
-          <a:ln w="19050">
-            <a:solidFill>
-              <a:srgbClr val="2F5597"/>
-            </a:solidFill>
-            <a:prstDash val="solid"/>
-            <a:tailEnd type="triangle"/>
-          </a:ln>
-        </p:spPr>
-      </p:sp>
-      <p:sp>
-        <p:nvSpPr>
-          <p:cNvPr id="15" name="Shape 13"/>
-          <p:cNvSpPr/>
-          <p:nvPr/>
-        </p:nvSpPr>
-        <p:spPr>
-          <a:xfrm>
-            <a:off x="8503920" y="2971800"/>
-            <a:ext cx="1188720" cy="548640"/>
-          </a:xfrm>
-          <a:prstGeom prst="line">
-            <a:avLst/>
-          </a:prstGeom>
-          <a:noFill/>
-          <a:ln w="19050">
-            <a:solidFill>
-              <a:srgbClr val="2F5597"/>
-            </a:solidFill>
-            <a:prstDash val="solid"/>
-            <a:tailEnd type="triangle"/>
-          </a:ln>
-        </p:spPr>
-      </p:sp>
-      <p:sp>
-        <p:nvSpPr>
-          <p:cNvPr id="16" name="Shape 14"/>
-          <p:cNvSpPr/>
-          <p:nvPr/>
-        </p:nvSpPr>
-        <p:spPr>
-          <a:xfrm>
-            <a:off x="4434840" y="3749040"/>
-            <a:ext cx="320040" cy="0"/>
-          </a:xfrm>
-          <a:prstGeom prst="line">
-            <a:avLst/>
-          </a:prstGeom>
-          <a:noFill/>
-          <a:ln w="19050">
-            <a:solidFill>
-              <a:srgbClr val="C55A11"/>
-            </a:solidFill>
-            <a:prstDash val="solid"/>
-            <a:tailEnd type="triangle"/>
-          </a:ln>
-        </p:spPr>
-      </p:sp>
-      <p:sp>
-        <p:nvSpPr>
-          <p:cNvPr id="17" name="Shape 15"/>
-          <p:cNvSpPr/>
-          <p:nvPr/>
-        </p:nvSpPr>
-        <p:spPr>
-          <a:xfrm>
-            <a:off x="6492240" y="3749040"/>
-            <a:ext cx="320040" cy="0"/>
-          </a:xfrm>
-          <a:prstGeom prst="line">
-            <a:avLst/>
-          </a:prstGeom>
-          <a:noFill/>
-          <a:ln w="19050">
-            <a:solidFill>
-              <a:srgbClr val="C55A11"/>
-            </a:solidFill>
-            <a:prstDash val="solid"/>
-            <a:tailEnd type="triangle"/>
-          </a:ln>
-        </p:spPr>
-      </p:sp>
-      <p:sp>
-        <p:nvSpPr>
-          <p:cNvPr id="18" name="Shape 16"/>
-          <p:cNvSpPr/>
-          <p:nvPr/>
-        </p:nvSpPr>
-        <p:spPr>
-          <a:xfrm>
-            <a:off x="8549640" y="3749040"/>
-            <a:ext cx="320040" cy="0"/>
-          </a:xfrm>
-          <a:prstGeom prst="line">
-            <a:avLst/>
-          </a:prstGeom>
-          <a:noFill/>
-          <a:ln w="19050">
-            <a:solidFill>
-              <a:srgbClr val="C55A11"/>
-            </a:solidFill>
-            <a:prstDash val="solid"/>
-            <a:tailEnd type="triangle"/>
-          </a:ln>
-        </p:spPr>
-      </p:sp>
-      <p:sp>
-        <p:nvSpPr>
-          <p:cNvPr id="19" name="Text 17"/>
-          <p:cNvSpPr/>
-          <p:nvPr/>
-        </p:nvSpPr>
-        <p:spPr>
-          <a:xfrm>
-            <a:off x="4892040" y="4343400"/>
-            <a:ext cx="1463040" cy="411480"/>
-          </a:xfrm>
-          <a:prstGeom prst="roundRect">
-            <a:avLst>
-              <a:gd name="adj" fmla="val 8889"/>
-            </a:avLst>
-          </a:prstGeom>
-          <a:solidFill>
-            <a:srgbClr val="F2F2F2"/>
-          </a:solidFill>
-          <a:ln w="15875">
-            <a:solidFill>
-              <a:srgbClr val="767171"/>
-            </a:solidFill>
-          </a:ln>
-        </p:spPr>
-        <p:txBody>
-          <a:bodyPr wrap="square" lIns="254" tIns="254" rIns="254" bIns="254" rtlCol="0" anchor="ctr"/>
-          <a:lstStyle/>
-          <a:p>
-            <a:pPr algn="ctr" indent="0" marL="0">
-              <a:buNone/>
-            </a:pPr>
-            <a:r>
-              <a:rPr lang="en-US" sz="1100" dirty="0">
-                <a:solidFill>
-                  <a:srgbClr val="000000"/>
-                </a:solidFill>
-                <a:latin typeface="Calibri" pitchFamily="34" charset="0"/>
-                <a:ea typeface="Calibri" pitchFamily="34" charset="-122"/>
-                <a:cs typeface="Calibri" pitchFamily="34" charset="-120"/>
-              </a:rPr>
-              <a:t>overflow</a:t>
-            </a:r>
-            <a:endParaRPr lang="en-US" sz="1100" dirty="0"/>
-          </a:p>
-        </p:txBody>
-      </p:sp>
-      <p:sp>
-        <p:nvSpPr>
-          <p:cNvPr id="20" name="Text 18"/>
-          <p:cNvSpPr/>
-          <p:nvPr/>
-        </p:nvSpPr>
-        <p:spPr>
-          <a:xfrm>
-            <a:off x="4709160" y="4892040"/>
-            <a:ext cx="1828800" cy="411480"/>
-          </a:xfrm>
-          <a:prstGeom prst="roundRect">
-            <a:avLst>
-              <a:gd name="adj" fmla="val 8889"/>
-            </a:avLst>
-          </a:prstGeom>
-          <a:solidFill>
-            <a:srgbClr val="F2F2F2"/>
-          </a:solidFill>
-          <a:ln w="15875">
-            <a:solidFill>
-              <a:srgbClr val="767171"/>
-            </a:solidFill>
-          </a:ln>
-        </p:spPr>
-        <p:txBody>
-          <a:bodyPr wrap="square" lIns="254" tIns="254" rIns="254" bIns="254" rtlCol="0" anchor="ctr"/>
-          <a:lstStyle/>
-          <a:p>
-            <a:pPr algn="ctr" indent="0" marL="0">
-              <a:buNone/>
-            </a:pPr>
-            <a:r>
-              <a:rPr lang="en-US" sz="1100" dirty="0">
-                <a:solidFill>
-                  <a:srgbClr val="000000"/>
-                </a:solidFill>
-                <a:latin typeface="Calibri" pitchFamily="34" charset="0"/>
-                <a:ea typeface="Calibri" pitchFamily="34" charset="-122"/>
-                <a:cs typeface="Calibri" pitchFamily="34" charset="-120"/>
-              </a:rPr>
-              <a:t>overflow</a:t>
-            </a:r>
-            <a:endParaRPr lang="en-US" sz="1100" dirty="0"/>
-          </a:p>
-        </p:txBody>
-      </p:sp>
-      <p:sp>
-        <p:nvSpPr>
-          <p:cNvPr id="21" name="Shape 19"/>
-          <p:cNvSpPr/>
-          <p:nvPr/>
-        </p:nvSpPr>
-        <p:spPr>
-          <a:xfrm>
-            <a:off x="5623560" y="3977640"/>
-            <a:ext cx="0" cy="365760"/>
-          </a:xfrm>
-          <a:prstGeom prst="line">
-            <a:avLst/>
-          </a:prstGeom>
-          <a:noFill/>
-          <a:ln w="19050">
-            <a:solidFill>
-              <a:srgbClr val="767171"/>
-            </a:solidFill>
-            <a:prstDash val="solid"/>
-            <a:tailEnd type="triangle"/>
-          </a:ln>
-        </p:spPr>
-      </p:sp>
-      <p:sp>
-        <p:nvSpPr>
-          <p:cNvPr id="22" name="Shape 20"/>
-          <p:cNvSpPr/>
-          <p:nvPr/>
-        </p:nvSpPr>
-        <p:spPr>
-          <a:xfrm>
-            <a:off x="5623560" y="4754880"/>
-            <a:ext cx="0" cy="137160"/>
-          </a:xfrm>
-          <a:prstGeom prst="line">
-            <a:avLst/>
-          </a:prstGeom>
-          <a:noFill/>
-          <a:ln w="19050">
-            <a:solidFill>
-              <a:srgbClr val="767171"/>
-            </a:solidFill>
-            <a:prstDash val="solid"/>
-            <a:tailEnd type="triangle"/>
-          </a:ln>
-        </p:spPr>
-      </p:sp>
-      <p:sp>
-        <p:nvSpPr>
           <p:cNvPr id="23" name="Shape 21"/>
           <p:cNvSpPr/>
           <p:nvPr/>
@@ -23584,7 +22941,7 @@
       </p:sp>
       <p:sp>
         <p:nvSpPr>
-          <p:cNvPr id="25" name="Slide Number Placeholder 0"/>
+          <p:cNvPr id="72" name="Slide Number Placeholder 0"/>
           <p:cNvSpPr>
             <a:spLocks noGrp="1"/>
           </p:cNvSpPr>
@@ -23627,6 +22984,1524 @@
               <a:t>4</a:t>
             </a:fld>
             <a:endParaRPr lang="en-US"/>
+          </a:p>
+        </p:txBody>
+      </p:sp>
+      <p:sp>
+        <p:nvSpPr>
+          <p:cNvPr id="27" name="Root page heading"/>
+          <p:cNvSpPr/>
+          <p:nvPr/>
+        </p:nvSpPr>
+        <p:spPr>
+          <a:xfrm>
+            <a:off x="3291840" y="960120"/>
+            <a:ext cx="4572000" cy="310896"/>
+          </a:xfrm>
+          <a:prstGeom prst="rect">
+            <a:avLst/>
+          </a:prstGeom>
+          <a:noFill/>
+          <a:ln w="12700">
+            <a:noFill/>
+          </a:ln>
+        </p:spPr>
+        <p:txBody>
+          <a:bodyPr wrap="square" lIns="18288" rIns="18288" tIns="9144" bIns="9144" anchor="ctr"/>
+          <a:lstStyle/>
+          <a:p>
+            <a:pPr algn="ctr" marL="0" indent="0">
+              <a:buNone/>
+            </a:pPr>
+            <a:r>
+              <a:rPr lang="en-US" sz="1600" b="1">
+                <a:solidFill>
+                  <a:srgbClr val="2F5597"/>
+                </a:solidFill>
+                <a:latin typeface="Calibri"/>
+              </a:rPr>
+              <a:t>Root separator page</a:t>
+            </a:r>
+            <a:endParaRPr lang="en-US" sz="1600"/>
+          </a:p>
+        </p:txBody>
+      </p:sp>
+      <p:sp>
+        <p:nvSpPr>
+          <p:cNvPr id="28" name="Root fanout heading"/>
+          <p:cNvSpPr/>
+          <p:nvPr/>
+        </p:nvSpPr>
+        <p:spPr>
+          <a:xfrm>
+            <a:off x="3291840" y="1289304"/>
+            <a:ext cx="4572000" cy="274320"/>
+          </a:xfrm>
+          <a:prstGeom prst="rect">
+            <a:avLst/>
+          </a:prstGeom>
+          <a:noFill/>
+          <a:ln w="12700">
+            <a:noFill/>
+          </a:ln>
+        </p:spPr>
+        <p:txBody>
+          <a:bodyPr wrap="square" lIns="18288" rIns="18288" tIns="9144" bIns="9144" anchor="ctr"/>
+          <a:lstStyle/>
+          <a:p>
+            <a:pPr algn="ctr" marL="0" indent="0">
+              <a:buNone/>
+            </a:pPr>
+            <a:r>
+              <a:rPr lang="en-US" sz="1300" b="0">
+                <a:solidFill>
+                  <a:srgbClr val="2F5597"/>
+                </a:solidFill>
+                <a:latin typeface="Calibri"/>
+              </a:rPr>
+              <a:t>3 separator keys and 4 child pointers</a:t>
+            </a:r>
+            <a:endParaRPr lang="en-US" sz="1300"/>
+          </a:p>
+        </p:txBody>
+      </p:sp>
+      <p:sp>
+        <p:nvSpPr>
+          <p:cNvPr id="29" name="Root slot 0"/>
+          <p:cNvSpPr/>
+          <p:nvPr/>
+        </p:nvSpPr>
+        <p:spPr>
+          <a:xfrm>
+            <a:off x="3703320" y="1700784"/>
+            <a:ext cx="621792" cy="502920"/>
+          </a:xfrm>
+          <a:prstGeom prst="rect">
+            <a:avLst/>
+          </a:prstGeom>
+          <a:solidFill>
+            <a:srgbClr val="DAE3F3"/>
+          </a:solidFill>
+          <a:ln w="12700">
+            <a:solidFill>
+              <a:srgbClr val="2F5597"/>
+            </a:solidFill>
+          </a:ln>
+        </p:spPr>
+        <p:txBody>
+          <a:bodyPr wrap="square" lIns="18288" rIns="18288" tIns="9144" bIns="9144" anchor="ctr"/>
+          <a:lstStyle/>
+          <a:p>
+            <a:pPr algn="ctr" marL="0" indent="0">
+              <a:buNone/>
+            </a:pPr>
+            <a:r>
+              <a:rPr lang="en-US" sz="1400" b="1">
+                <a:solidFill>
+                  <a:srgbClr val="2F5597"/>
+                </a:solidFill>
+                <a:latin typeface="Calibri"/>
+              </a:rPr>
+              <a:t>P0</a:t>
+            </a:r>
+            <a:endParaRPr lang="en-US" sz="1400"/>
+          </a:p>
+        </p:txBody>
+      </p:sp>
+      <p:sp>
+        <p:nvSpPr>
+          <p:cNvPr id="30" name="Root slot 1"/>
+          <p:cNvSpPr/>
+          <p:nvPr/>
+        </p:nvSpPr>
+        <p:spPr>
+          <a:xfrm>
+            <a:off x="4325112" y="1700784"/>
+            <a:ext cx="621792" cy="502920"/>
+          </a:xfrm>
+          <a:prstGeom prst="rect">
+            <a:avLst/>
+          </a:prstGeom>
+          <a:solidFill>
+            <a:srgbClr val="FFFFFF"/>
+          </a:solidFill>
+          <a:ln w="12700">
+            <a:solidFill>
+              <a:srgbClr val="2F5597"/>
+            </a:solidFill>
+          </a:ln>
+        </p:spPr>
+        <p:txBody>
+          <a:bodyPr wrap="square" lIns="18288" rIns="18288" tIns="9144" bIns="9144" anchor="ctr"/>
+          <a:lstStyle/>
+          <a:p>
+            <a:pPr algn="ctr" marL="0" indent="0">
+              <a:buNone/>
+            </a:pPr>
+            <a:r>
+              <a:rPr lang="en-US" sz="1400" b="0">
+                <a:solidFill>
+                  <a:srgbClr val="2F5597"/>
+                </a:solidFill>
+                <a:latin typeface="Calibri"/>
+              </a:rPr>
+              <a:t>K1</a:t>
+            </a:r>
+            <a:endParaRPr lang="en-US" sz="1400"/>
+          </a:p>
+        </p:txBody>
+      </p:sp>
+      <p:sp>
+        <p:nvSpPr>
+          <p:cNvPr id="31" name="Root slot 2"/>
+          <p:cNvSpPr/>
+          <p:nvPr/>
+        </p:nvSpPr>
+        <p:spPr>
+          <a:xfrm>
+            <a:off x="4946904" y="1700784"/>
+            <a:ext cx="621792" cy="502920"/>
+          </a:xfrm>
+          <a:prstGeom prst="rect">
+            <a:avLst/>
+          </a:prstGeom>
+          <a:solidFill>
+            <a:srgbClr val="DAE3F3"/>
+          </a:solidFill>
+          <a:ln w="12700">
+            <a:solidFill>
+              <a:srgbClr val="2F5597"/>
+            </a:solidFill>
+          </a:ln>
+        </p:spPr>
+        <p:txBody>
+          <a:bodyPr wrap="square" lIns="18288" rIns="18288" tIns="9144" bIns="9144" anchor="ctr"/>
+          <a:lstStyle/>
+          <a:p>
+            <a:pPr algn="ctr" marL="0" indent="0">
+              <a:buNone/>
+            </a:pPr>
+            <a:r>
+              <a:rPr lang="en-US" sz="1400" b="1">
+                <a:solidFill>
+                  <a:srgbClr val="2F5597"/>
+                </a:solidFill>
+                <a:latin typeface="Calibri"/>
+              </a:rPr>
+              <a:t>P1</a:t>
+            </a:r>
+            <a:endParaRPr lang="en-US" sz="1400"/>
+          </a:p>
+        </p:txBody>
+      </p:sp>
+      <p:sp>
+        <p:nvSpPr>
+          <p:cNvPr id="32" name="Root slot 3"/>
+          <p:cNvSpPr/>
+          <p:nvPr/>
+        </p:nvSpPr>
+        <p:spPr>
+          <a:xfrm>
+            <a:off x="5568696" y="1700784"/>
+            <a:ext cx="621792" cy="502920"/>
+          </a:xfrm>
+          <a:prstGeom prst="rect">
+            <a:avLst/>
+          </a:prstGeom>
+          <a:solidFill>
+            <a:srgbClr val="FFFFFF"/>
+          </a:solidFill>
+          <a:ln w="12700">
+            <a:solidFill>
+              <a:srgbClr val="2F5597"/>
+            </a:solidFill>
+          </a:ln>
+        </p:spPr>
+        <p:txBody>
+          <a:bodyPr wrap="square" lIns="18288" rIns="18288" tIns="9144" bIns="9144" anchor="ctr"/>
+          <a:lstStyle/>
+          <a:p>
+            <a:pPr algn="ctr" marL="0" indent="0">
+              <a:buNone/>
+            </a:pPr>
+            <a:r>
+              <a:rPr lang="en-US" sz="1400" b="0">
+                <a:solidFill>
+                  <a:srgbClr val="2F5597"/>
+                </a:solidFill>
+                <a:latin typeface="Calibri"/>
+              </a:rPr>
+              <a:t>K2</a:t>
+            </a:r>
+            <a:endParaRPr lang="en-US" sz="1400"/>
+          </a:p>
+        </p:txBody>
+      </p:sp>
+      <p:sp>
+        <p:nvSpPr>
+          <p:cNvPr id="33" name="Root slot 4"/>
+          <p:cNvSpPr/>
+          <p:nvPr/>
+        </p:nvSpPr>
+        <p:spPr>
+          <a:xfrm>
+            <a:off x="6190488" y="1700784"/>
+            <a:ext cx="621792" cy="502920"/>
+          </a:xfrm>
+          <a:prstGeom prst="rect">
+            <a:avLst/>
+          </a:prstGeom>
+          <a:solidFill>
+            <a:srgbClr val="DAE3F3"/>
+          </a:solidFill>
+          <a:ln w="12700">
+            <a:solidFill>
+              <a:srgbClr val="2F5597"/>
+            </a:solidFill>
+          </a:ln>
+        </p:spPr>
+        <p:txBody>
+          <a:bodyPr wrap="square" lIns="18288" rIns="18288" tIns="9144" bIns="9144" anchor="ctr"/>
+          <a:lstStyle/>
+          <a:p>
+            <a:pPr algn="ctr" marL="0" indent="0">
+              <a:buNone/>
+            </a:pPr>
+            <a:r>
+              <a:rPr lang="en-US" sz="1400" b="1">
+                <a:solidFill>
+                  <a:srgbClr val="2F5597"/>
+                </a:solidFill>
+                <a:latin typeface="Calibri"/>
+              </a:rPr>
+              <a:t>P2</a:t>
+            </a:r>
+            <a:endParaRPr lang="en-US" sz="1400"/>
+          </a:p>
+        </p:txBody>
+      </p:sp>
+      <p:sp>
+        <p:nvSpPr>
+          <p:cNvPr id="34" name="Root slot 5"/>
+          <p:cNvSpPr/>
+          <p:nvPr/>
+        </p:nvSpPr>
+        <p:spPr>
+          <a:xfrm>
+            <a:off x="6812280" y="1700784"/>
+            <a:ext cx="621792" cy="502920"/>
+          </a:xfrm>
+          <a:prstGeom prst="rect">
+            <a:avLst/>
+          </a:prstGeom>
+          <a:solidFill>
+            <a:srgbClr val="FFFFFF"/>
+          </a:solidFill>
+          <a:ln w="12700">
+            <a:solidFill>
+              <a:srgbClr val="2F5597"/>
+            </a:solidFill>
+          </a:ln>
+        </p:spPr>
+        <p:txBody>
+          <a:bodyPr wrap="square" lIns="18288" rIns="18288" tIns="9144" bIns="9144" anchor="ctr"/>
+          <a:lstStyle/>
+          <a:p>
+            <a:pPr algn="ctr" marL="0" indent="0">
+              <a:buNone/>
+            </a:pPr>
+            <a:r>
+              <a:rPr lang="en-US" sz="1400" b="0">
+                <a:solidFill>
+                  <a:srgbClr val="2F5597"/>
+                </a:solidFill>
+                <a:latin typeface="Calibri"/>
+              </a:rPr>
+              <a:t>K3</a:t>
+            </a:r>
+            <a:endParaRPr lang="en-US" sz="1400"/>
+          </a:p>
+        </p:txBody>
+      </p:sp>
+      <p:sp>
+        <p:nvSpPr>
+          <p:cNvPr id="35" name="Root slot 6"/>
+          <p:cNvSpPr/>
+          <p:nvPr/>
+        </p:nvSpPr>
+        <p:spPr>
+          <a:xfrm>
+            <a:off x="7434072" y="1700784"/>
+            <a:ext cx="621792" cy="502920"/>
+          </a:xfrm>
+          <a:prstGeom prst="rect">
+            <a:avLst/>
+          </a:prstGeom>
+          <a:solidFill>
+            <a:srgbClr val="DAE3F3"/>
+          </a:solidFill>
+          <a:ln w="12700">
+            <a:solidFill>
+              <a:srgbClr val="2F5597"/>
+            </a:solidFill>
+          </a:ln>
+        </p:spPr>
+        <p:txBody>
+          <a:bodyPr wrap="square" lIns="18288" rIns="18288" tIns="9144" bIns="9144" anchor="ctr"/>
+          <a:lstStyle/>
+          <a:p>
+            <a:pPr algn="ctr" marL="0" indent="0">
+              <a:buNone/>
+            </a:pPr>
+            <a:r>
+              <a:rPr lang="en-US" sz="1400" b="1">
+                <a:solidFill>
+                  <a:srgbClr val="2F5597"/>
+                </a:solidFill>
+                <a:latin typeface="Calibri"/>
+              </a:rPr>
+              <a:t>P3</a:t>
+            </a:r>
+            <a:endParaRPr lang="en-US" sz="1400"/>
+          </a:p>
+        </p:txBody>
+      </p:sp>
+      <p:sp>
+        <p:nvSpPr>
+          <p:cNvPr id="36" name="Root P0 child pointer"/>
+          <p:cNvSpPr/>
+          <p:nvPr/>
+        </p:nvSpPr>
+        <p:spPr>
+          <a:xfrm flipH="1">
+            <a:off x="2089404" y="2203704"/>
+            <a:ext cx="1924812" cy="448056"/>
+          </a:xfrm>
+          <a:prstGeom prst="line">
+            <a:avLst/>
+          </a:prstGeom>
+          <a:noFill/>
+          <a:ln w="19050">
+            <a:solidFill>
+              <a:srgbClr val="2F5597"/>
+            </a:solidFill>
+            <a:tailEnd type="triangle" w="sm" len="sm"/>
+          </a:ln>
+        </p:spPr>
+      </p:sp>
+      <p:sp>
+        <p:nvSpPr>
+          <p:cNvPr id="37" name="Child separator 0"/>
+          <p:cNvSpPr/>
+          <p:nvPr/>
+        </p:nvSpPr>
+        <p:spPr>
+          <a:xfrm>
+            <a:off x="1175004" y="2651760"/>
+            <a:ext cx="1828800" cy="457200"/>
+          </a:xfrm>
+          <a:prstGeom prst="rect">
+            <a:avLst/>
+          </a:prstGeom>
+          <a:solidFill>
+            <a:srgbClr val="DAE3F3"/>
+          </a:solidFill>
+          <a:ln w="12700">
+            <a:solidFill>
+              <a:srgbClr val="2F5597"/>
+            </a:solidFill>
+          </a:ln>
+        </p:spPr>
+        <p:txBody>
+          <a:bodyPr wrap="square" lIns="18288" rIns="18288" tIns="9144" bIns="9144" anchor="ctr"/>
+          <a:lstStyle/>
+          <a:p>
+            <a:pPr algn="ctr" marL="0" indent="0">
+              <a:buNone/>
+            </a:pPr>
+            <a:r>
+              <a:rPr lang="en-US" sz="1200" b="0">
+                <a:solidFill>
+                  <a:srgbClr val="000000"/>
+                </a:solidFill>
+                <a:latin typeface="Calibri"/>
+              </a:rPr>
+              <a:t>separator</a:t>
+            </a:r>
+            <a:endParaRPr lang="en-US" sz="1200"/>
+          </a:p>
+        </p:txBody>
+      </p:sp>
+      <p:sp>
+        <p:nvSpPr>
+          <p:cNvPr id="38" name="Separator 0 leaf pointer 0"/>
+          <p:cNvSpPr/>
+          <p:nvPr/>
+        </p:nvSpPr>
+        <p:spPr>
+          <a:xfrm flipH="1">
+            <a:off x="1417320" y="3108960"/>
+            <a:ext cx="352044" cy="502920"/>
+          </a:xfrm>
+          <a:prstGeom prst="line">
+            <a:avLst/>
+          </a:prstGeom>
+          <a:noFill/>
+          <a:ln w="19050">
+            <a:solidFill>
+              <a:srgbClr val="2F5597"/>
+            </a:solidFill>
+            <a:tailEnd type="triangle" w="sm" len="sm"/>
+          </a:ln>
+        </p:spPr>
+      </p:sp>
+      <p:sp>
+        <p:nvSpPr>
+          <p:cNvPr id="39" name="Separator 0 leaf pointer 1"/>
+          <p:cNvSpPr/>
+          <p:nvPr/>
+        </p:nvSpPr>
+        <p:spPr>
+          <a:xfrm>
+            <a:off x="2409444" y="3108960"/>
+            <a:ext cx="352044" cy="502920"/>
+          </a:xfrm>
+          <a:prstGeom prst="line">
+            <a:avLst/>
+          </a:prstGeom>
+          <a:noFill/>
+          <a:ln w="19050">
+            <a:solidFill>
+              <a:srgbClr val="2F5597"/>
+            </a:solidFill>
+            <a:tailEnd type="triangle" w="sm" len="sm"/>
+          </a:ln>
+        </p:spPr>
+      </p:sp>
+      <p:sp>
+        <p:nvSpPr>
+          <p:cNvPr id="40" name="Root P1 child pointer"/>
+          <p:cNvSpPr/>
+          <p:nvPr/>
+        </p:nvSpPr>
+        <p:spPr>
+          <a:xfrm flipH="1">
+            <a:off x="4777740" y="2203704"/>
+            <a:ext cx="480060" cy="448056"/>
+          </a:xfrm>
+          <a:prstGeom prst="line">
+            <a:avLst/>
+          </a:prstGeom>
+          <a:noFill/>
+          <a:ln w="19050">
+            <a:solidFill>
+              <a:srgbClr val="2F5597"/>
+            </a:solidFill>
+            <a:tailEnd type="triangle" w="sm" len="sm"/>
+          </a:ln>
+        </p:spPr>
+      </p:sp>
+      <p:sp>
+        <p:nvSpPr>
+          <p:cNvPr id="41" name="Child separator 1"/>
+          <p:cNvSpPr/>
+          <p:nvPr/>
+        </p:nvSpPr>
+        <p:spPr>
+          <a:xfrm>
+            <a:off x="3863340" y="2651760"/>
+            <a:ext cx="1828800" cy="457200"/>
+          </a:xfrm>
+          <a:prstGeom prst="rect">
+            <a:avLst/>
+          </a:prstGeom>
+          <a:solidFill>
+            <a:srgbClr val="DAE3F3"/>
+          </a:solidFill>
+          <a:ln w="12700">
+            <a:solidFill>
+              <a:srgbClr val="2F5597"/>
+            </a:solidFill>
+          </a:ln>
+        </p:spPr>
+        <p:txBody>
+          <a:bodyPr wrap="square" lIns="18288" rIns="18288" tIns="9144" bIns="9144" anchor="ctr"/>
+          <a:lstStyle/>
+          <a:p>
+            <a:pPr algn="ctr" marL="0" indent="0">
+              <a:buNone/>
+            </a:pPr>
+            <a:r>
+              <a:rPr lang="en-US" sz="1200" b="0">
+                <a:solidFill>
+                  <a:srgbClr val="000000"/>
+                </a:solidFill>
+                <a:latin typeface="Calibri"/>
+              </a:rPr>
+              <a:t>separator</a:t>
+            </a:r>
+            <a:endParaRPr lang="en-US" sz="1200"/>
+          </a:p>
+        </p:txBody>
+      </p:sp>
+      <p:sp>
+        <p:nvSpPr>
+          <p:cNvPr id="42" name="Separator 1 leaf pointer 0"/>
+          <p:cNvSpPr/>
+          <p:nvPr/>
+        </p:nvSpPr>
+        <p:spPr>
+          <a:xfrm flipH="1">
+            <a:off x="4105656" y="3108960"/>
+            <a:ext cx="352044" cy="502920"/>
+          </a:xfrm>
+          <a:prstGeom prst="line">
+            <a:avLst/>
+          </a:prstGeom>
+          <a:noFill/>
+          <a:ln w="19050">
+            <a:solidFill>
+              <a:srgbClr val="2F5597"/>
+            </a:solidFill>
+            <a:tailEnd type="triangle" w="sm" len="sm"/>
+          </a:ln>
+        </p:spPr>
+      </p:sp>
+      <p:sp>
+        <p:nvSpPr>
+          <p:cNvPr id="43" name="Separator 1 leaf pointer 1"/>
+          <p:cNvSpPr/>
+          <p:nvPr/>
+        </p:nvSpPr>
+        <p:spPr>
+          <a:xfrm>
+            <a:off x="5097780" y="3108960"/>
+            <a:ext cx="352044" cy="502920"/>
+          </a:xfrm>
+          <a:prstGeom prst="line">
+            <a:avLst/>
+          </a:prstGeom>
+          <a:noFill/>
+          <a:ln w="19050">
+            <a:solidFill>
+              <a:srgbClr val="2F5597"/>
+            </a:solidFill>
+            <a:tailEnd type="triangle" w="sm" len="sm"/>
+          </a:ln>
+        </p:spPr>
+      </p:sp>
+      <p:sp>
+        <p:nvSpPr>
+          <p:cNvPr id="44" name="Root P2 child pointer"/>
+          <p:cNvSpPr/>
+          <p:nvPr/>
+        </p:nvSpPr>
+        <p:spPr>
+          <a:xfrm>
+            <a:off x="6501384" y="2203704"/>
+            <a:ext cx="964692" cy="448056"/>
+          </a:xfrm>
+          <a:prstGeom prst="line">
+            <a:avLst/>
+          </a:prstGeom>
+          <a:noFill/>
+          <a:ln w="19050">
+            <a:solidFill>
+              <a:srgbClr val="2F5597"/>
+            </a:solidFill>
+            <a:tailEnd type="triangle" w="sm" len="sm"/>
+          </a:ln>
+        </p:spPr>
+      </p:sp>
+      <p:sp>
+        <p:nvSpPr>
+          <p:cNvPr id="45" name="Child separator 2"/>
+          <p:cNvSpPr/>
+          <p:nvPr/>
+        </p:nvSpPr>
+        <p:spPr>
+          <a:xfrm>
+            <a:off x="6551676" y="2651760"/>
+            <a:ext cx="1828800" cy="457200"/>
+          </a:xfrm>
+          <a:prstGeom prst="rect">
+            <a:avLst/>
+          </a:prstGeom>
+          <a:solidFill>
+            <a:srgbClr val="DAE3F3"/>
+          </a:solidFill>
+          <a:ln w="12700">
+            <a:solidFill>
+              <a:srgbClr val="2F5597"/>
+            </a:solidFill>
+          </a:ln>
+        </p:spPr>
+        <p:txBody>
+          <a:bodyPr wrap="square" lIns="18288" rIns="18288" tIns="9144" bIns="9144" anchor="ctr"/>
+          <a:lstStyle/>
+          <a:p>
+            <a:pPr algn="ctr" marL="0" indent="0">
+              <a:buNone/>
+            </a:pPr>
+            <a:r>
+              <a:rPr lang="en-US" sz="1200" b="0">
+                <a:solidFill>
+                  <a:srgbClr val="000000"/>
+                </a:solidFill>
+                <a:latin typeface="Calibri"/>
+              </a:rPr>
+              <a:t>separator</a:t>
+            </a:r>
+            <a:endParaRPr lang="en-US" sz="1200"/>
+          </a:p>
+        </p:txBody>
+      </p:sp>
+      <p:sp>
+        <p:nvSpPr>
+          <p:cNvPr id="46" name="Separator 2 leaf pointer 0"/>
+          <p:cNvSpPr/>
+          <p:nvPr/>
+        </p:nvSpPr>
+        <p:spPr>
+          <a:xfrm flipH="1">
+            <a:off x="6793992" y="3108960"/>
+            <a:ext cx="352044" cy="502920"/>
+          </a:xfrm>
+          <a:prstGeom prst="line">
+            <a:avLst/>
+          </a:prstGeom>
+          <a:noFill/>
+          <a:ln w="19050">
+            <a:solidFill>
+              <a:srgbClr val="2F5597"/>
+            </a:solidFill>
+            <a:tailEnd type="triangle" w="sm" len="sm"/>
+          </a:ln>
+        </p:spPr>
+      </p:sp>
+      <p:sp>
+        <p:nvSpPr>
+          <p:cNvPr id="47" name="Separator 2 leaf pointer 1"/>
+          <p:cNvSpPr/>
+          <p:nvPr/>
+        </p:nvSpPr>
+        <p:spPr>
+          <a:xfrm>
+            <a:off x="7786116" y="3108960"/>
+            <a:ext cx="352044" cy="502920"/>
+          </a:xfrm>
+          <a:prstGeom prst="line">
+            <a:avLst/>
+          </a:prstGeom>
+          <a:noFill/>
+          <a:ln w="19050">
+            <a:solidFill>
+              <a:srgbClr val="2F5597"/>
+            </a:solidFill>
+            <a:tailEnd type="triangle" w="sm" len="sm"/>
+          </a:ln>
+        </p:spPr>
+      </p:sp>
+      <p:sp>
+        <p:nvSpPr>
+          <p:cNvPr id="48" name="Root P3 child pointer"/>
+          <p:cNvSpPr/>
+          <p:nvPr/>
+        </p:nvSpPr>
+        <p:spPr>
+          <a:xfrm>
+            <a:off x="7744968" y="2203704"/>
+            <a:ext cx="2409444" cy="448056"/>
+          </a:xfrm>
+          <a:prstGeom prst="line">
+            <a:avLst/>
+          </a:prstGeom>
+          <a:noFill/>
+          <a:ln w="19050">
+            <a:solidFill>
+              <a:srgbClr val="2F5597"/>
+            </a:solidFill>
+            <a:tailEnd type="triangle" w="sm" len="sm"/>
+          </a:ln>
+        </p:spPr>
+      </p:sp>
+      <p:sp>
+        <p:nvSpPr>
+          <p:cNvPr id="49" name="Child separator 3"/>
+          <p:cNvSpPr/>
+          <p:nvPr/>
+        </p:nvSpPr>
+        <p:spPr>
+          <a:xfrm>
+            <a:off x="9240012" y="2651760"/>
+            <a:ext cx="1828800" cy="457200"/>
+          </a:xfrm>
+          <a:prstGeom prst="rect">
+            <a:avLst/>
+          </a:prstGeom>
+          <a:solidFill>
+            <a:srgbClr val="DAE3F3"/>
+          </a:solidFill>
+          <a:ln w="12700">
+            <a:solidFill>
+              <a:srgbClr val="2F5597"/>
+            </a:solidFill>
+          </a:ln>
+        </p:spPr>
+        <p:txBody>
+          <a:bodyPr wrap="square" lIns="18288" rIns="18288" tIns="9144" bIns="9144" anchor="ctr"/>
+          <a:lstStyle/>
+          <a:p>
+            <a:pPr algn="ctr" marL="0" indent="0">
+              <a:buNone/>
+            </a:pPr>
+            <a:r>
+              <a:rPr lang="en-US" sz="1200" b="0">
+                <a:solidFill>
+                  <a:srgbClr val="000000"/>
+                </a:solidFill>
+                <a:latin typeface="Calibri"/>
+              </a:rPr>
+              <a:t>separator</a:t>
+            </a:r>
+            <a:endParaRPr lang="en-US" sz="1200"/>
+          </a:p>
+        </p:txBody>
+      </p:sp>
+      <p:sp>
+        <p:nvSpPr>
+          <p:cNvPr id="50" name="Separator 3 leaf pointer 0"/>
+          <p:cNvSpPr/>
+          <p:nvPr/>
+        </p:nvSpPr>
+        <p:spPr>
+          <a:xfrm flipH="1">
+            <a:off x="9482328" y="3108960"/>
+            <a:ext cx="352044" cy="502920"/>
+          </a:xfrm>
+          <a:prstGeom prst="line">
+            <a:avLst/>
+          </a:prstGeom>
+          <a:noFill/>
+          <a:ln w="19050">
+            <a:solidFill>
+              <a:srgbClr val="2F5597"/>
+            </a:solidFill>
+            <a:tailEnd type="triangle" w="sm" len="sm"/>
+          </a:ln>
+        </p:spPr>
+      </p:sp>
+      <p:sp>
+        <p:nvSpPr>
+          <p:cNvPr id="51" name="Separator 3 leaf pointer 1"/>
+          <p:cNvSpPr/>
+          <p:nvPr/>
+        </p:nvSpPr>
+        <p:spPr>
+          <a:xfrm>
+            <a:off x="10474452" y="3108960"/>
+            <a:ext cx="352044" cy="502920"/>
+          </a:xfrm>
+          <a:prstGeom prst="line">
+            <a:avLst/>
+          </a:prstGeom>
+          <a:noFill/>
+          <a:ln w="19050">
+            <a:solidFill>
+              <a:srgbClr val="2F5597"/>
+            </a:solidFill>
+            <a:tailEnd type="triangle" w="sm" len="sm"/>
+          </a:ln>
+        </p:spPr>
+      </p:sp>
+      <p:sp>
+        <p:nvSpPr>
+          <p:cNvPr id="52" name="Leaf 1"/>
+          <p:cNvSpPr/>
+          <p:nvPr/>
+        </p:nvSpPr>
+        <p:spPr>
+          <a:xfrm>
+            <a:off x="914400" y="3611880"/>
+            <a:ext cx="1005840" cy="457200"/>
+          </a:xfrm>
+          <a:prstGeom prst="rect">
+            <a:avLst/>
+          </a:prstGeom>
+          <a:solidFill>
+            <a:srgbClr val="FBE5D6"/>
+          </a:solidFill>
+          <a:ln w="12700">
+            <a:solidFill>
+              <a:srgbClr val="C55A11"/>
+            </a:solidFill>
+          </a:ln>
+        </p:spPr>
+        <p:txBody>
+          <a:bodyPr wrap="square" lIns="18288" rIns="18288" tIns="9144" bIns="9144" anchor="ctr"/>
+          <a:lstStyle/>
+          <a:p>
+            <a:pPr algn="ctr" marL="0" indent="0">
+              <a:buNone/>
+            </a:pPr>
+            <a:r>
+              <a:rPr lang="en-US" sz="1200" b="0">
+                <a:solidFill>
+                  <a:srgbClr val="000000"/>
+                </a:solidFill>
+                <a:latin typeface="Calibri"/>
+              </a:rPr>
+              <a:t>L1</a:t>
+            </a:r>
+            <a:endParaRPr lang="en-US" sz="1200"/>
+          </a:p>
+        </p:txBody>
+      </p:sp>
+      <p:sp>
+        <p:nvSpPr>
+          <p:cNvPr id="53" name="Leaf link 1"/>
+          <p:cNvSpPr/>
+          <p:nvPr/>
+        </p:nvSpPr>
+        <p:spPr>
+          <a:xfrm>
+            <a:off x="1920240" y="3840480"/>
+            <a:ext cx="338328" cy="0"/>
+          </a:xfrm>
+          <a:prstGeom prst="line">
+            <a:avLst/>
+          </a:prstGeom>
+          <a:noFill/>
+          <a:ln w="19050">
+            <a:solidFill>
+              <a:srgbClr val="C55A11"/>
+            </a:solidFill>
+            <a:tailEnd type="triangle" w="sm" len="sm"/>
+          </a:ln>
+        </p:spPr>
+      </p:sp>
+      <p:sp>
+        <p:nvSpPr>
+          <p:cNvPr id="54" name="Leaf 2"/>
+          <p:cNvSpPr/>
+          <p:nvPr/>
+        </p:nvSpPr>
+        <p:spPr>
+          <a:xfrm>
+            <a:off x="2258568" y="3611880"/>
+            <a:ext cx="1005840" cy="457200"/>
+          </a:xfrm>
+          <a:prstGeom prst="rect">
+            <a:avLst/>
+          </a:prstGeom>
+          <a:solidFill>
+            <a:srgbClr val="FBE5D6"/>
+          </a:solidFill>
+          <a:ln w="12700">
+            <a:solidFill>
+              <a:srgbClr val="C55A11"/>
+            </a:solidFill>
+          </a:ln>
+        </p:spPr>
+        <p:txBody>
+          <a:bodyPr wrap="square" lIns="18288" rIns="18288" tIns="9144" bIns="9144" anchor="ctr"/>
+          <a:lstStyle/>
+          <a:p>
+            <a:pPr algn="ctr" marL="0" indent="0">
+              <a:buNone/>
+            </a:pPr>
+            <a:r>
+              <a:rPr lang="en-US" sz="1200" b="0">
+                <a:solidFill>
+                  <a:srgbClr val="000000"/>
+                </a:solidFill>
+                <a:latin typeface="Calibri"/>
+              </a:rPr>
+              <a:t>L2</a:t>
+            </a:r>
+            <a:endParaRPr lang="en-US" sz="1200"/>
+          </a:p>
+        </p:txBody>
+      </p:sp>
+      <p:sp>
+        <p:nvSpPr>
+          <p:cNvPr id="55" name="Leaf link 2"/>
+          <p:cNvSpPr/>
+          <p:nvPr/>
+        </p:nvSpPr>
+        <p:spPr>
+          <a:xfrm>
+            <a:off x="3264408" y="3840480"/>
+            <a:ext cx="338328" cy="0"/>
+          </a:xfrm>
+          <a:prstGeom prst="line">
+            <a:avLst/>
+          </a:prstGeom>
+          <a:noFill/>
+          <a:ln w="19050">
+            <a:solidFill>
+              <a:srgbClr val="C55A11"/>
+            </a:solidFill>
+            <a:tailEnd type="triangle" w="sm" len="sm"/>
+          </a:ln>
+        </p:spPr>
+      </p:sp>
+      <p:sp>
+        <p:nvSpPr>
+          <p:cNvPr id="56" name="Leaf 3"/>
+          <p:cNvSpPr/>
+          <p:nvPr/>
+        </p:nvSpPr>
+        <p:spPr>
+          <a:xfrm>
+            <a:off x="3602736" y="3611880"/>
+            <a:ext cx="1005840" cy="457200"/>
+          </a:xfrm>
+          <a:prstGeom prst="rect">
+            <a:avLst/>
+          </a:prstGeom>
+          <a:solidFill>
+            <a:srgbClr val="FBE5D6"/>
+          </a:solidFill>
+          <a:ln w="12700">
+            <a:solidFill>
+              <a:srgbClr val="C55A11"/>
+            </a:solidFill>
+          </a:ln>
+        </p:spPr>
+        <p:txBody>
+          <a:bodyPr wrap="square" lIns="18288" rIns="18288" tIns="9144" bIns="9144" anchor="ctr"/>
+          <a:lstStyle/>
+          <a:p>
+            <a:pPr algn="ctr" marL="0" indent="0">
+              <a:buNone/>
+            </a:pPr>
+            <a:r>
+              <a:rPr lang="en-US" sz="1200" b="0">
+                <a:solidFill>
+                  <a:srgbClr val="000000"/>
+                </a:solidFill>
+                <a:latin typeface="Calibri"/>
+              </a:rPr>
+              <a:t>L3</a:t>
+            </a:r>
+            <a:endParaRPr lang="en-US" sz="1200"/>
+          </a:p>
+        </p:txBody>
+      </p:sp>
+      <p:sp>
+        <p:nvSpPr>
+          <p:cNvPr id="57" name="Leaf link 3"/>
+          <p:cNvSpPr/>
+          <p:nvPr/>
+        </p:nvSpPr>
+        <p:spPr>
+          <a:xfrm>
+            <a:off x="4608576" y="3840480"/>
+            <a:ext cx="338328" cy="0"/>
+          </a:xfrm>
+          <a:prstGeom prst="line">
+            <a:avLst/>
+          </a:prstGeom>
+          <a:noFill/>
+          <a:ln w="19050">
+            <a:solidFill>
+              <a:srgbClr val="C55A11"/>
+            </a:solidFill>
+            <a:tailEnd type="triangle" w="sm" len="sm"/>
+          </a:ln>
+        </p:spPr>
+      </p:sp>
+      <p:sp>
+        <p:nvSpPr>
+          <p:cNvPr id="58" name="Leaf 4"/>
+          <p:cNvSpPr/>
+          <p:nvPr/>
+        </p:nvSpPr>
+        <p:spPr>
+          <a:xfrm>
+            <a:off x="4946904" y="3611880"/>
+            <a:ext cx="1005840" cy="457200"/>
+          </a:xfrm>
+          <a:prstGeom prst="rect">
+            <a:avLst/>
+          </a:prstGeom>
+          <a:solidFill>
+            <a:srgbClr val="FBE5D6"/>
+          </a:solidFill>
+          <a:ln w="12700">
+            <a:solidFill>
+              <a:srgbClr val="C55A11"/>
+            </a:solidFill>
+          </a:ln>
+        </p:spPr>
+        <p:txBody>
+          <a:bodyPr wrap="square" lIns="18288" rIns="18288" tIns="9144" bIns="9144" anchor="ctr"/>
+          <a:lstStyle/>
+          <a:p>
+            <a:pPr algn="ctr" marL="0" indent="0">
+              <a:buNone/>
+            </a:pPr>
+            <a:r>
+              <a:rPr lang="en-US" sz="1200" b="0">
+                <a:solidFill>
+                  <a:srgbClr val="000000"/>
+                </a:solidFill>
+                <a:latin typeface="Calibri"/>
+              </a:rPr>
+              <a:t>L4</a:t>
+            </a:r>
+            <a:endParaRPr lang="en-US" sz="1200"/>
+          </a:p>
+        </p:txBody>
+      </p:sp>
+      <p:sp>
+        <p:nvSpPr>
+          <p:cNvPr id="59" name="Leaf link 4"/>
+          <p:cNvSpPr/>
+          <p:nvPr/>
+        </p:nvSpPr>
+        <p:spPr>
+          <a:xfrm>
+            <a:off x="5952744" y="3840480"/>
+            <a:ext cx="338328" cy="0"/>
+          </a:xfrm>
+          <a:prstGeom prst="line">
+            <a:avLst/>
+          </a:prstGeom>
+          <a:noFill/>
+          <a:ln w="19050">
+            <a:solidFill>
+              <a:srgbClr val="C55A11"/>
+            </a:solidFill>
+            <a:tailEnd type="triangle" w="sm" len="sm"/>
+          </a:ln>
+        </p:spPr>
+      </p:sp>
+      <p:sp>
+        <p:nvSpPr>
+          <p:cNvPr id="60" name="Leaf 5"/>
+          <p:cNvSpPr/>
+          <p:nvPr/>
+        </p:nvSpPr>
+        <p:spPr>
+          <a:xfrm>
+            <a:off x="6291072" y="3611880"/>
+            <a:ext cx="1005840" cy="457200"/>
+          </a:xfrm>
+          <a:prstGeom prst="rect">
+            <a:avLst/>
+          </a:prstGeom>
+          <a:solidFill>
+            <a:srgbClr val="FBE5D6"/>
+          </a:solidFill>
+          <a:ln w="12700">
+            <a:solidFill>
+              <a:srgbClr val="C55A11"/>
+            </a:solidFill>
+          </a:ln>
+        </p:spPr>
+        <p:txBody>
+          <a:bodyPr wrap="square" lIns="18288" rIns="18288" tIns="9144" bIns="9144" anchor="ctr"/>
+          <a:lstStyle/>
+          <a:p>
+            <a:pPr algn="ctr" marL="0" indent="0">
+              <a:buNone/>
+            </a:pPr>
+            <a:r>
+              <a:rPr lang="en-US" sz="1200" b="0">
+                <a:solidFill>
+                  <a:srgbClr val="000000"/>
+                </a:solidFill>
+                <a:latin typeface="Calibri"/>
+              </a:rPr>
+              <a:t>L5</a:t>
+            </a:r>
+            <a:endParaRPr lang="en-US" sz="1200"/>
+          </a:p>
+        </p:txBody>
+      </p:sp>
+      <p:sp>
+        <p:nvSpPr>
+          <p:cNvPr id="61" name="Leaf link 5"/>
+          <p:cNvSpPr/>
+          <p:nvPr/>
+        </p:nvSpPr>
+        <p:spPr>
+          <a:xfrm>
+            <a:off x="7296912" y="3840480"/>
+            <a:ext cx="338328" cy="0"/>
+          </a:xfrm>
+          <a:prstGeom prst="line">
+            <a:avLst/>
+          </a:prstGeom>
+          <a:noFill/>
+          <a:ln w="19050">
+            <a:solidFill>
+              <a:srgbClr val="C55A11"/>
+            </a:solidFill>
+            <a:tailEnd type="triangle" w="sm" len="sm"/>
+          </a:ln>
+        </p:spPr>
+      </p:sp>
+      <p:sp>
+        <p:nvSpPr>
+          <p:cNvPr id="62" name="Leaf 6"/>
+          <p:cNvSpPr/>
+          <p:nvPr/>
+        </p:nvSpPr>
+        <p:spPr>
+          <a:xfrm>
+            <a:off x="7635240" y="3611880"/>
+            <a:ext cx="1005840" cy="457200"/>
+          </a:xfrm>
+          <a:prstGeom prst="rect">
+            <a:avLst/>
+          </a:prstGeom>
+          <a:solidFill>
+            <a:srgbClr val="FBE5D6"/>
+          </a:solidFill>
+          <a:ln w="12700">
+            <a:solidFill>
+              <a:srgbClr val="C55A11"/>
+            </a:solidFill>
+          </a:ln>
+        </p:spPr>
+        <p:txBody>
+          <a:bodyPr wrap="square" lIns="18288" rIns="18288" tIns="9144" bIns="9144" anchor="ctr"/>
+          <a:lstStyle/>
+          <a:p>
+            <a:pPr algn="ctr" marL="0" indent="0">
+              <a:buNone/>
+            </a:pPr>
+            <a:r>
+              <a:rPr lang="en-US" sz="1200" b="0">
+                <a:solidFill>
+                  <a:srgbClr val="000000"/>
+                </a:solidFill>
+                <a:latin typeface="Calibri"/>
+              </a:rPr>
+              <a:t>L6</a:t>
+            </a:r>
+            <a:endParaRPr lang="en-US" sz="1200"/>
+          </a:p>
+        </p:txBody>
+      </p:sp>
+      <p:sp>
+        <p:nvSpPr>
+          <p:cNvPr id="63" name="Leaf link 6"/>
+          <p:cNvSpPr/>
+          <p:nvPr/>
+        </p:nvSpPr>
+        <p:spPr>
+          <a:xfrm>
+            <a:off x="8641080" y="3840480"/>
+            <a:ext cx="338328" cy="0"/>
+          </a:xfrm>
+          <a:prstGeom prst="line">
+            <a:avLst/>
+          </a:prstGeom>
+          <a:noFill/>
+          <a:ln w="19050">
+            <a:solidFill>
+              <a:srgbClr val="C55A11"/>
+            </a:solidFill>
+            <a:tailEnd type="triangle" w="sm" len="sm"/>
+          </a:ln>
+        </p:spPr>
+      </p:sp>
+      <p:sp>
+        <p:nvSpPr>
+          <p:cNvPr id="64" name="Leaf 7"/>
+          <p:cNvSpPr/>
+          <p:nvPr/>
+        </p:nvSpPr>
+        <p:spPr>
+          <a:xfrm>
+            <a:off x="8979408" y="3611880"/>
+            <a:ext cx="1005840" cy="457200"/>
+          </a:xfrm>
+          <a:prstGeom prst="rect">
+            <a:avLst/>
+          </a:prstGeom>
+          <a:solidFill>
+            <a:srgbClr val="FBE5D6"/>
+          </a:solidFill>
+          <a:ln w="12700">
+            <a:solidFill>
+              <a:srgbClr val="C55A11"/>
+            </a:solidFill>
+          </a:ln>
+        </p:spPr>
+        <p:txBody>
+          <a:bodyPr wrap="square" lIns="18288" rIns="18288" tIns="9144" bIns="9144" anchor="ctr"/>
+          <a:lstStyle/>
+          <a:p>
+            <a:pPr algn="ctr" marL="0" indent="0">
+              <a:buNone/>
+            </a:pPr>
+            <a:r>
+              <a:rPr lang="en-US" sz="1200" b="0">
+                <a:solidFill>
+                  <a:srgbClr val="000000"/>
+                </a:solidFill>
+                <a:latin typeface="Calibri"/>
+              </a:rPr>
+              <a:t>L7</a:t>
+            </a:r>
+            <a:endParaRPr lang="en-US" sz="1200"/>
+          </a:p>
+        </p:txBody>
+      </p:sp>
+      <p:sp>
+        <p:nvSpPr>
+          <p:cNvPr id="65" name="Leaf link 7"/>
+          <p:cNvSpPr/>
+          <p:nvPr/>
+        </p:nvSpPr>
+        <p:spPr>
+          <a:xfrm>
+            <a:off x="9985248" y="3840480"/>
+            <a:ext cx="338328" cy="0"/>
+          </a:xfrm>
+          <a:prstGeom prst="line">
+            <a:avLst/>
+          </a:prstGeom>
+          <a:noFill/>
+          <a:ln w="19050">
+            <a:solidFill>
+              <a:srgbClr val="C55A11"/>
+            </a:solidFill>
+            <a:tailEnd type="triangle" w="sm" len="sm"/>
+          </a:ln>
+        </p:spPr>
+      </p:sp>
+      <p:sp>
+        <p:nvSpPr>
+          <p:cNvPr id="66" name="Leaf 8"/>
+          <p:cNvSpPr/>
+          <p:nvPr/>
+        </p:nvSpPr>
+        <p:spPr>
+          <a:xfrm>
+            <a:off x="10323576" y="3611880"/>
+            <a:ext cx="1005840" cy="457200"/>
+          </a:xfrm>
+          <a:prstGeom prst="rect">
+            <a:avLst/>
+          </a:prstGeom>
+          <a:solidFill>
+            <a:srgbClr val="FBE5D6"/>
+          </a:solidFill>
+          <a:ln w="12700">
+            <a:solidFill>
+              <a:srgbClr val="C55A11"/>
+            </a:solidFill>
+          </a:ln>
+        </p:spPr>
+        <p:txBody>
+          <a:bodyPr wrap="square" lIns="18288" rIns="18288" tIns="9144" bIns="9144" anchor="ctr"/>
+          <a:lstStyle/>
+          <a:p>
+            <a:pPr algn="ctr" marL="0" indent="0">
+              <a:buNone/>
+            </a:pPr>
+            <a:r>
+              <a:rPr lang="en-US" sz="1200" b="0">
+                <a:solidFill>
+                  <a:srgbClr val="000000"/>
+                </a:solidFill>
+                <a:latin typeface="Calibri"/>
+              </a:rPr>
+              <a:t>L8</a:t>
+            </a:r>
+            <a:endParaRPr lang="en-US" sz="1200"/>
+          </a:p>
+        </p:txBody>
+      </p:sp>
+      <p:sp>
+        <p:nvSpPr>
+          <p:cNvPr id="67" name="Leaf overflow head"/>
+          <p:cNvSpPr/>
+          <p:nvPr/>
+        </p:nvSpPr>
+        <p:spPr>
+          <a:xfrm>
+            <a:off x="5449824" y="4069080"/>
+            <a:ext cx="0" cy="320040"/>
+          </a:xfrm>
+          <a:prstGeom prst="line">
+            <a:avLst/>
+          </a:prstGeom>
+          <a:noFill/>
+          <a:ln w="19050">
+            <a:solidFill>
+              <a:srgbClr val="7F7F7F"/>
+            </a:solidFill>
+            <a:tailEnd type="triangle" w="sm" len="sm"/>
+          </a:ln>
+        </p:spPr>
+      </p:sp>
+      <p:sp>
+        <p:nvSpPr>
+          <p:cNvPr id="68" name="Overflow page 1"/>
+          <p:cNvSpPr/>
+          <p:nvPr/>
+        </p:nvSpPr>
+        <p:spPr>
+          <a:xfrm>
+            <a:off x="4718304" y="4389120"/>
+            <a:ext cx="1463040" cy="365760"/>
+          </a:xfrm>
+          <a:prstGeom prst="rect">
+            <a:avLst/>
+          </a:prstGeom>
+          <a:solidFill>
+            <a:srgbClr val="F2F2F2"/>
+          </a:solidFill>
+          <a:ln w="12700">
+            <a:solidFill>
+              <a:srgbClr val="7F7F7F"/>
+            </a:solidFill>
+          </a:ln>
+        </p:spPr>
+        <p:txBody>
+          <a:bodyPr wrap="square" lIns="18288" rIns="18288" tIns="9144" bIns="9144" anchor="ctr"/>
+          <a:lstStyle/>
+          <a:p>
+            <a:pPr algn="ctr" marL="0" indent="0">
+              <a:buNone/>
+            </a:pPr>
+            <a:r>
+              <a:rPr lang="en-US" sz="1200" b="0">
+                <a:solidFill>
+                  <a:srgbClr val="000000"/>
+                </a:solidFill>
+                <a:latin typeface="Calibri"/>
+              </a:rPr>
+              <a:t>overflow</a:t>
+            </a:r>
+            <a:endParaRPr lang="en-US" sz="1200"/>
+          </a:p>
+        </p:txBody>
+      </p:sp>
+      <p:sp>
+        <p:nvSpPr>
+          <p:cNvPr id="69" name="Overflow next"/>
+          <p:cNvSpPr/>
+          <p:nvPr/>
+        </p:nvSpPr>
+        <p:spPr>
+          <a:xfrm>
+            <a:off x="5449824" y="4754880"/>
+            <a:ext cx="0" cy="182880"/>
+          </a:xfrm>
+          <a:prstGeom prst="line">
+            <a:avLst/>
+          </a:prstGeom>
+          <a:noFill/>
+          <a:ln w="19050">
+            <a:solidFill>
+              <a:srgbClr val="7F7F7F"/>
+            </a:solidFill>
+            <a:tailEnd type="triangle" w="sm" len="sm"/>
+          </a:ln>
+        </p:spPr>
+      </p:sp>
+      <p:sp>
+        <p:nvSpPr>
+          <p:cNvPr id="70" name="Overflow page 2"/>
+          <p:cNvSpPr/>
+          <p:nvPr/>
+        </p:nvSpPr>
+        <p:spPr>
+          <a:xfrm>
+            <a:off x="4718304" y="4937760"/>
+            <a:ext cx="1463040" cy="365760"/>
+          </a:xfrm>
+          <a:prstGeom prst="rect">
+            <a:avLst/>
+          </a:prstGeom>
+          <a:solidFill>
+            <a:srgbClr val="F2F2F2"/>
+          </a:solidFill>
+          <a:ln w="12700">
+            <a:solidFill>
+              <a:srgbClr val="7F7F7F"/>
+            </a:solidFill>
+          </a:ln>
+        </p:spPr>
+        <p:txBody>
+          <a:bodyPr wrap="square" lIns="18288" rIns="18288" tIns="9144" bIns="9144" anchor="ctr"/>
+          <a:lstStyle/>
+          <a:p>
+            <a:pPr algn="ctr" marL="0" indent="0">
+              <a:buNone/>
+            </a:pPr>
+            <a:r>
+              <a:rPr lang="en-US" sz="1200" b="0">
+                <a:solidFill>
+                  <a:srgbClr val="000000"/>
+                </a:solidFill>
+                <a:latin typeface="Calibri"/>
+              </a:rPr>
+              <a:t>overflow</a:t>
+            </a:r>
+            <a:endParaRPr lang="en-US" sz="1200"/>
+          </a:p>
+        </p:txBody>
+      </p:sp>
+      <p:sp>
+        <p:nvSpPr>
+          <p:cNvPr id="71" name="Root fanout explanation"/>
+          <p:cNvSpPr/>
+          <p:nvPr/>
+        </p:nvSpPr>
+        <p:spPr>
+          <a:xfrm>
+            <a:off x="7406640" y="4434840"/>
+            <a:ext cx="3657600" cy="594360"/>
+          </a:xfrm>
+          <a:prstGeom prst="rect">
+            <a:avLst/>
+          </a:prstGeom>
+          <a:noFill/>
+          <a:ln w="12700">
+            <a:noFill/>
+          </a:ln>
+        </p:spPr>
+        <p:txBody>
+          <a:bodyPr wrap="square" lIns="18288" rIns="18288" tIns="9144" bIns="9144" anchor="ctr"/>
+          <a:lstStyle/>
+          <a:p>
+            <a:pPr algn="l" marL="0" indent="0">
+              <a:buNone/>
+            </a:pPr>
+            <a:r>
+              <a:rPr lang="en-US" sz="1400" b="0">
+                <a:solidFill>
+                  <a:srgbClr val="2F5597"/>
+                </a:solidFill>
+                <a:latin typeface="Calibri"/>
+              </a:rPr>
+              <a:t>A separator page with n keys</a:t>
+            </a:r>
+            <a:endParaRPr lang="en-US" sz="1400"/>
+          </a:p>
+          <a:p>
+            <a:pPr algn="l" marL="0" indent="0">
+              <a:buNone/>
+            </a:pPr>
+            <a:r>
+              <a:rPr lang="en-US" sz="1400" b="0">
+                <a:solidFill>
+                  <a:srgbClr val="2F5597"/>
+                </a:solidFill>
+                <a:latin typeface="Calibri"/>
+              </a:rPr>
+              <a:t>has n + 1 child pointers.</a:t>
+            </a:r>
+            <a:endParaRPr lang="en-US" sz="1400"/>
           </a:p>
         </p:txBody>
       </p:sp>
@@ -23681,7 +24556,7 @@
             </a:pPr>
             <a:r>
               <a:rPr lang="en-US" dirty="0"/>
-              <a:t>Block 0 — the Header Page</a:t>
+              <a:t>Header, Root, and Child Pages</a:t>
             </a:r>
             <a:endParaRPr lang="en-US" dirty="0"/>
           </a:p>
@@ -23696,7 +24571,7 @@
         <p:spPr>
           <a:xfrm>
             <a:off x="841248" y="1554480"/>
-            <a:ext cx="5486400" cy="4572000"/>
+            <a:ext cx="4069080" cy="4572000"/>
           </a:xfrm>
           <a:prstGeom prst="rect">
             <a:avLst>
@@ -23723,7 +24598,7 @@
         <p:spPr>
           <a:xfrm>
             <a:off x="1005840" y="1664208"/>
-            <a:ext cx="1828800" cy="274320"/>
+            <a:ext cx="3611880" cy="274320"/>
           </a:xfrm>
           <a:prstGeom prst="rect">
             <a:avLst/>
@@ -23747,7 +24622,7 @@
                 <a:ea typeface="Calibri" pitchFamily="34" charset="-122"/>
                 <a:cs typeface="Calibri" pitchFamily="34" charset="-120"/>
               </a:rPr>
-              <a:t>block 0</a:t>
+              <a:t>Example header, block 0</a:t>
             </a:r>
             <a:endParaRPr lang="en-US" sz="1200" dirty="0"/>
           </a:p>
@@ -23762,7 +24637,7 @@
         <p:spPr>
           <a:xfrm>
             <a:off x="1005840" y="2011680"/>
-            <a:ext cx="2103120" cy="347472"/>
+            <a:ext cx="1325880" cy="347472"/>
           </a:xfrm>
           <a:prstGeom prst="rect">
             <a:avLst/>
@@ -23806,8 +24681,8 @@
         </p:nvSpPr>
         <p:spPr>
           <a:xfrm>
-            <a:off x="3108960" y="2011680"/>
-            <a:ext cx="3054096" cy="347472"/>
+            <a:off x="2331720" y="2011680"/>
+            <a:ext cx="2414016" cy="347472"/>
           </a:xfrm>
           <a:prstGeom prst="rect">
             <a:avLst/>
@@ -23829,7 +24704,7 @@
               <a:buNone/>
             </a:pPr>
             <a:r>
-              <a:rPr lang="en-US" sz="1050" dirty="0">
+              <a:rPr lang="en-US" sz="1100" dirty="0">
                 <a:solidFill>
                   <a:srgbClr val="000000"/>
                 </a:solidFill>
@@ -23839,7 +24714,7 @@
               </a:rPr>
               <a:t>"ISAM"</a:t>
             </a:r>
-            <a:endParaRPr lang="en-US" sz="1050" dirty="0"/>
+            <a:endParaRPr lang="en-US" sz="1100" dirty="0"/>
           </a:p>
         </p:txBody>
       </p:sp>
@@ -23852,7 +24727,7 @@
         <p:spPr>
           <a:xfrm>
             <a:off x="1005840" y="2414016"/>
-            <a:ext cx="2103120" cy="347472"/>
+            <a:ext cx="1325880" cy="347472"/>
           </a:xfrm>
           <a:prstGeom prst="rect">
             <a:avLst/>
@@ -23896,8 +24771,8 @@
         </p:nvSpPr>
         <p:spPr>
           <a:xfrm>
-            <a:off x="3108960" y="2414016"/>
-            <a:ext cx="3054096" cy="347472"/>
+            <a:off x="2331720" y="2414016"/>
+            <a:ext cx="2414016" cy="347472"/>
           </a:xfrm>
           <a:prstGeom prst="rect">
             <a:avLst/>
@@ -23919,7 +24794,7 @@
               <a:buNone/>
             </a:pPr>
             <a:r>
-              <a:rPr lang="en-US" sz="1050" dirty="0">
+              <a:rPr lang="en-US" sz="1100" dirty="0">
                 <a:solidFill>
                   <a:srgbClr val="000000"/>
                 </a:solidFill>
@@ -23927,9 +24802,9 @@
                 <a:ea typeface="Courier New" pitchFamily="34" charset="-122"/>
                 <a:cs typeface="Courier New" pitchFamily="34" charset="-120"/>
               </a:rPr>
-              <a:t>Integer · Double · String</a:t>
-            </a:r>
-            <a:endParaRPr lang="en-US" sz="1050" dirty="0"/>
+              <a:t>Integer</a:t>
+            </a:r>
+            <a:endParaRPr lang="en-US" sz="1100" dirty="0"/>
           </a:p>
         </p:txBody>
       </p:sp>
@@ -23942,7 +24817,7 @@
         <p:spPr>
           <a:xfrm>
             <a:off x="1005840" y="2816352"/>
-            <a:ext cx="2103120" cy="347472"/>
+            <a:ext cx="1325880" cy="347472"/>
           </a:xfrm>
           <a:prstGeom prst="rect">
             <a:avLst/>
@@ -23986,8 +24861,8 @@
         </p:nvSpPr>
         <p:spPr>
           <a:xfrm>
-            <a:off x="3108960" y="2816352"/>
-            <a:ext cx="3054096" cy="347472"/>
+            <a:off x="2331720" y="2816352"/>
+            <a:ext cx="2414016" cy="347472"/>
           </a:xfrm>
           <a:prstGeom prst="rect">
             <a:avLst/>
@@ -24009,7 +24884,7 @@
               <a:buNone/>
             </a:pPr>
             <a:r>
-              <a:rPr lang="en-US" sz="1050" dirty="0">
+              <a:rPr lang="en-US" sz="1100" dirty="0">
                 <a:solidFill>
                   <a:srgbClr val="000000"/>
                 </a:solidFill>
@@ -24017,9 +24892,9 @@
                 <a:ea typeface="Courier New" pitchFamily="34" charset="-122"/>
                 <a:cs typeface="Courier New" pitchFamily="34" charset="-120"/>
               </a:rPr>
-              <a:t>4 / 8 / declared</a:t>
-            </a:r>
-            <a:endParaRPr lang="en-US" sz="1050" dirty="0"/>
+              <a:t>4 bytes</a:t>
+            </a:r>
+            <a:endParaRPr lang="en-US" sz="1100" dirty="0"/>
           </a:p>
         </p:txBody>
       </p:sp>
@@ -24032,7 +24907,7 @@
         <p:spPr>
           <a:xfrm>
             <a:off x="1005840" y="3218688"/>
-            <a:ext cx="2103120" cy="347472"/>
+            <a:ext cx="1325880" cy="347472"/>
           </a:xfrm>
           <a:prstGeom prst="rect">
             <a:avLst/>
@@ -24076,8 +24951,8 @@
         </p:nvSpPr>
         <p:spPr>
           <a:xfrm>
-            <a:off x="3108960" y="3218688"/>
-            <a:ext cx="3054096" cy="347472"/>
+            <a:off x="2331720" y="3218688"/>
+            <a:ext cx="2414016" cy="347472"/>
           </a:xfrm>
           <a:prstGeom prst="rect">
             <a:avLst/>
@@ -24099,7 +24974,7 @@
               <a:buNone/>
             </a:pPr>
             <a:r>
-              <a:rPr lang="en-US" sz="1050" dirty="0">
+              <a:rPr lang="en-US" sz="1100" dirty="0">
                 <a:solidFill>
                   <a:srgbClr val="000000"/>
                 </a:solidFill>
@@ -24107,9 +24982,9 @@
                 <a:ea typeface="Courier New" pitchFamily="34" charset="-122"/>
                 <a:cs typeface="Courier New" pitchFamily="34" charset="-120"/>
               </a:rPr>
-              <a:t>len + bytes (&lt;= 200)</a:t>
-            </a:r>
-            <a:endParaRPr lang="en-US" sz="1050" dirty="0"/>
+              <a:t>person</a:t>
+            </a:r>
+            <a:endParaRPr lang="en-US" sz="1100" dirty="0"/>
           </a:p>
         </p:txBody>
       </p:sp>
@@ -24122,7 +24997,7 @@
         <p:spPr>
           <a:xfrm>
             <a:off x="1005840" y="3621024"/>
-            <a:ext cx="2103120" cy="347472"/>
+            <a:ext cx="1325880" cy="347472"/>
           </a:xfrm>
           <a:prstGeom prst="rect">
             <a:avLst/>
@@ -24166,8 +25041,8 @@
         </p:nvSpPr>
         <p:spPr>
           <a:xfrm>
-            <a:off x="3108960" y="3621024"/>
-            <a:ext cx="3054096" cy="347472"/>
+            <a:off x="2331720" y="3621024"/>
+            <a:ext cx="2414016" cy="347472"/>
           </a:xfrm>
           <a:prstGeom prst="rect">
             <a:avLst/>
@@ -24189,7 +25064,7 @@
               <a:buNone/>
             </a:pPr>
             <a:r>
-              <a:rPr lang="en-US" sz="1050" dirty="0">
+              <a:rPr lang="en-US" sz="1100" dirty="0">
                 <a:solidFill>
                   <a:srgbClr val="000000"/>
                 </a:solidFill>
@@ -24197,9 +25072,9 @@
                 <a:ea typeface="Courier New" pitchFamily="34" charset="-122"/>
                 <a:cs typeface="Courier New" pitchFamily="34" charset="-120"/>
               </a:rPr>
-              <a:t>len + bytes</a:t>
-            </a:r>
-            <a:endParaRPr lang="en-US" sz="1050" dirty="0"/>
+              <a:t>pid</a:t>
+            </a:r>
+            <a:endParaRPr lang="en-US" sz="1100" dirty="0"/>
           </a:p>
         </p:txBody>
       </p:sp>
@@ -24212,7 +25087,97 @@
         <p:spPr>
           <a:xfrm>
             <a:off x="1005840" y="4023360"/>
-            <a:ext cx="2103120" cy="347472"/>
+            <a:ext cx="1325880" cy="347472"/>
+          </a:xfrm>
+          <a:prstGeom prst="rect">
+            <a:avLst/>
+          </a:prstGeom>
+          <a:ln w="6350">
+            <a:solidFill>
+              <a:srgbClr val="2F5597"/>
+            </a:solidFill>
+          </a:ln>
+          <a:solidFill>
+            <a:srgbClr val="DAE3F3"/>
+          </a:solidFill>
+        </p:spPr>
+        <p:txBody>
+          <a:bodyPr wrap="square" lIns="762" tIns="762" rIns="762" bIns="762" rtlCol="0" anchor="ctr"/>
+          <a:lstStyle/>
+          <a:p>
+            <a:pPr algn="l" indent="0" marL="0">
+              <a:buNone/>
+            </a:pPr>
+            <a:r>
+              <a:rPr lang="en-US" sz="1100" dirty="0" b="1">
+                <a:solidFill>
+                  <a:srgbClr val="2F5597"/>
+                </a:solidFill>
+                <a:latin typeface="Calibri" pitchFamily="34" charset="0"/>
+                <a:ea typeface="Calibri" pitchFamily="34" charset="-122"/>
+                <a:cs typeface="Calibri" pitchFamily="34" charset="-120"/>
+              </a:rPr>
+              <a:t>root block</a:t>
+            </a:r>
+            <a:endParaRPr lang="en-US" sz="1100" dirty="0"/>
+          </a:p>
+        </p:txBody>
+      </p:sp>
+      <p:sp>
+        <p:nvSpPr>
+          <p:cNvPr id="16" name="Text 14"/>
+          <p:cNvSpPr/>
+          <p:nvPr/>
+        </p:nvSpPr>
+        <p:spPr>
+          <a:xfrm>
+            <a:off x="2331720" y="4023360"/>
+            <a:ext cx="2414016" cy="347472"/>
+          </a:xfrm>
+          <a:prstGeom prst="rect">
+            <a:avLst/>
+          </a:prstGeom>
+          <a:ln w="6350">
+            <a:solidFill>
+              <a:srgbClr val="2F5597"/>
+            </a:solidFill>
+          </a:ln>
+          <a:solidFill>
+            <a:srgbClr val="DAE3F3"/>
+          </a:solidFill>
+        </p:spPr>
+        <p:txBody>
+          <a:bodyPr wrap="square" lIns="762" tIns="762" rIns="762" bIns="762" rtlCol="0" anchor="ctr"/>
+          <a:lstStyle/>
+          <a:p>
+            <a:pPr algn="l" indent="0" marL="0">
+              <a:buNone/>
+            </a:pPr>
+            <a:r>
+              <a:rPr lang="en-US" sz="1100" dirty="0" b="1">
+                <a:solidFill>
+                  <a:srgbClr val="2F5597"/>
+                </a:solidFill>
+                <a:latin typeface="Courier New" pitchFamily="34" charset="0"/>
+                <a:ea typeface="Courier New" pitchFamily="34" charset="-122"/>
+                <a:cs typeface="Courier New" pitchFamily="34" charset="-120"/>
+              </a:rPr>
+              <a:t>4 (u32)</a:t>
+            </a:r>
+            <a:endParaRPr lang="en-US" sz="1100" dirty="0"/>
+          </a:p>
+        </p:txBody>
+      </p:sp>
+      <p:sp>
+        <p:nvSpPr>
+          <p:cNvPr id="17" name="Text 15"/>
+          <p:cNvSpPr/>
+          <p:nvPr/>
+        </p:nvSpPr>
+        <p:spPr>
+          <a:xfrm>
+            <a:off x="1005840" y="4425696"/>
+            <a:ext cx="1325880" cy="347472"/>
           </a:xfrm>
           <a:prstGeom prst="rect">
             <a:avLst/>
@@ -24242,7 +25207,7 @@
                 <a:ea typeface="Calibri" pitchFamily="34" charset="-122"/>
                 <a:cs typeface="Calibri" pitchFamily="34" charset="-120"/>
               </a:rPr>
-              <a:t>root block</a:t>
+              <a:t>first leaf</a:t>
             </a:r>
             <a:endParaRPr lang="en-US" sz="1100" dirty="0"/>
           </a:p>
@@ -24250,14 +25215,14 @@
       </p:sp>
       <p:sp>
         <p:nvSpPr>
-          <p:cNvPr id="16" name="Text 14"/>
-          <p:cNvSpPr/>
-          <p:nvPr/>
-        </p:nvSpPr>
-        <p:spPr>
-          <a:xfrm>
-            <a:off x="3108960" y="4023360"/>
-            <a:ext cx="3054096" cy="347472"/>
+          <p:cNvPr id="18" name="Text 16"/>
+          <p:cNvSpPr/>
+          <p:nvPr/>
+        </p:nvSpPr>
+        <p:spPr>
+          <a:xfrm>
+            <a:off x="2331720" y="4425696"/>
+            <a:ext cx="2414016" cy="347472"/>
           </a:xfrm>
           <a:prstGeom prst="rect">
             <a:avLst/>
@@ -24279,7 +25244,7 @@
               <a:buNone/>
             </a:pPr>
             <a:r>
-              <a:rPr lang="en-US" sz="1050" dirty="0">
+              <a:rPr lang="en-US" sz="1100" dirty="0">
                 <a:solidFill>
                   <a:srgbClr val="000000"/>
                 </a:solidFill>
@@ -24287,22 +25252,22 @@
                 <a:ea typeface="Courier New" pitchFamily="34" charset="-122"/>
                 <a:cs typeface="Courier New" pitchFamily="34" charset="-120"/>
               </a:rPr>
-              <a:t>u32</a:t>
-            </a:r>
-            <a:endParaRPr lang="en-US" sz="1050" dirty="0"/>
-          </a:p>
-        </p:txBody>
-      </p:sp>
-      <p:sp>
-        <p:nvSpPr>
-          <p:cNvPr id="17" name="Text 15"/>
-          <p:cNvSpPr/>
-          <p:nvPr/>
-        </p:nvSpPr>
-        <p:spPr>
-          <a:xfrm>
-            <a:off x="1005840" y="4425696"/>
-            <a:ext cx="2103120" cy="347472"/>
+              <a:t>1 (u32)</a:t>
+            </a:r>
+            <a:endParaRPr lang="en-US" sz="1100" dirty="0"/>
+          </a:p>
+        </p:txBody>
+      </p:sp>
+      <p:sp>
+        <p:nvSpPr>
+          <p:cNvPr id="19" name="Text 17"/>
+          <p:cNvSpPr/>
+          <p:nvPr/>
+        </p:nvSpPr>
+        <p:spPr>
+          <a:xfrm>
+            <a:off x="1005840" y="4828032"/>
+            <a:ext cx="1325880" cy="347472"/>
           </a:xfrm>
           <a:prstGeom prst="rect">
             <a:avLst/>
@@ -24332,7 +25297,7 @@
                 <a:ea typeface="Calibri" pitchFamily="34" charset="-122"/>
                 <a:cs typeface="Calibri" pitchFamily="34" charset="-120"/>
               </a:rPr>
-              <a:t>first leaf</a:t>
+              <a:t>level count</a:t>
             </a:r>
             <a:endParaRPr lang="en-US" sz="1100" dirty="0"/>
           </a:p>
@@ -24340,14 +25305,14 @@
       </p:sp>
       <p:sp>
         <p:nvSpPr>
-          <p:cNvPr id="18" name="Text 16"/>
-          <p:cNvSpPr/>
-          <p:nvPr/>
-        </p:nvSpPr>
-        <p:spPr>
-          <a:xfrm>
-            <a:off x="3108960" y="4425696"/>
-            <a:ext cx="3054096" cy="347472"/>
+          <p:cNvPr id="20" name="Text 18"/>
+          <p:cNvSpPr/>
+          <p:nvPr/>
+        </p:nvSpPr>
+        <p:spPr>
+          <a:xfrm>
+            <a:off x="2331720" y="4828032"/>
+            <a:ext cx="2414016" cy="347472"/>
           </a:xfrm>
           <a:prstGeom prst="rect">
             <a:avLst/>
@@ -24369,7 +25334,7 @@
               <a:buNone/>
             </a:pPr>
             <a:r>
-              <a:rPr lang="en-US" sz="1050" dirty="0">
+              <a:rPr lang="en-US" sz="1100" dirty="0">
                 <a:solidFill>
                   <a:srgbClr val="000000"/>
                 </a:solidFill>
@@ -24377,22 +25342,22 @@
                 <a:ea typeface="Courier New" pitchFamily="34" charset="-122"/>
                 <a:cs typeface="Courier New" pitchFamily="34" charset="-120"/>
               </a:rPr>
-              <a:t>u32</a:t>
-            </a:r>
-            <a:endParaRPr lang="en-US" sz="1050" dirty="0"/>
-          </a:p>
-        </p:txBody>
-      </p:sp>
-      <p:sp>
-        <p:nvSpPr>
-          <p:cNvPr id="19" name="Text 17"/>
-          <p:cNvSpPr/>
-          <p:nvPr/>
-        </p:nvSpPr>
-        <p:spPr>
-          <a:xfrm>
-            <a:off x="1005840" y="4828032"/>
-            <a:ext cx="2103120" cy="347472"/>
+              <a:t>2 (u32)</a:t>
+            </a:r>
+            <a:endParaRPr lang="en-US" sz="1100" dirty="0"/>
+          </a:p>
+        </p:txBody>
+      </p:sp>
+      <p:sp>
+        <p:nvSpPr>
+          <p:cNvPr id="21" name="Text 19"/>
+          <p:cNvSpPr/>
+          <p:nvPr/>
+        </p:nvSpPr>
+        <p:spPr>
+          <a:xfrm>
+            <a:off x="1005840" y="5230368"/>
+            <a:ext cx="1325880" cy="347472"/>
           </a:xfrm>
           <a:prstGeom prst="rect">
             <a:avLst/>
@@ -24422,7 +25387,7 @@
                 <a:ea typeface="Calibri" pitchFamily="34" charset="-122"/>
                 <a:cs typeface="Calibri" pitchFamily="34" charset="-120"/>
               </a:rPr>
-              <a:t>level count</a:t>
+              <a:t>entry count</a:t>
             </a:r>
             <a:endParaRPr lang="en-US" sz="1100" dirty="0"/>
           </a:p>
@@ -24430,14 +25395,14 @@
       </p:sp>
       <p:sp>
         <p:nvSpPr>
-          <p:cNvPr id="20" name="Text 18"/>
-          <p:cNvSpPr/>
-          <p:nvPr/>
-        </p:nvSpPr>
-        <p:spPr>
-          <a:xfrm>
-            <a:off x="3108960" y="4828032"/>
-            <a:ext cx="3054096" cy="347472"/>
+          <p:cNvPr id="22" name="Text 20"/>
+          <p:cNvSpPr/>
+          <p:nvPr/>
+        </p:nvSpPr>
+        <p:spPr>
+          <a:xfrm>
+            <a:off x="2331720" y="5230368"/>
+            <a:ext cx="2414016" cy="347472"/>
           </a:xfrm>
           <a:prstGeom prst="rect">
             <a:avLst/>
@@ -24459,7 +25424,7 @@
               <a:buNone/>
             </a:pPr>
             <a:r>
-              <a:rPr lang="en-US" sz="1050" dirty="0">
+              <a:rPr lang="en-US" sz="1100" dirty="0">
                 <a:solidFill>
                   <a:srgbClr val="000000"/>
                 </a:solidFill>
@@ -24467,22 +25432,22 @@
                 <a:ea typeface="Courier New" pitchFamily="34" charset="-122"/>
                 <a:cs typeface="Courier New" pitchFamily="34" charset="-120"/>
               </a:rPr>
-              <a:t>u32</a:t>
-            </a:r>
-            <a:endParaRPr lang="en-US" sz="1050" dirty="0"/>
-          </a:p>
-        </p:txBody>
-      </p:sp>
-      <p:sp>
-        <p:nvSpPr>
-          <p:cNvPr id="21" name="Text 19"/>
-          <p:cNvSpPr/>
-          <p:nvPr/>
-        </p:nvSpPr>
-        <p:spPr>
-          <a:xfrm>
-            <a:off x="1005840" y="5230368"/>
-            <a:ext cx="2103120" cy="347472"/>
+              <a:t>1000 (u64)</a:t>
+            </a:r>
+            <a:endParaRPr lang="en-US" sz="1100" dirty="0"/>
+          </a:p>
+        </p:txBody>
+      </p:sp>
+      <p:sp>
+        <p:nvSpPr>
+          <p:cNvPr id="23" name="Text 21"/>
+          <p:cNvSpPr/>
+          <p:nvPr/>
+        </p:nvSpPr>
+        <p:spPr>
+          <a:xfrm>
+            <a:off x="1005840" y="5632704"/>
+            <a:ext cx="1325880" cy="347472"/>
           </a:xfrm>
           <a:prstGeom prst="rect">
             <a:avLst/>
@@ -24512,7 +25477,7 @@
                 <a:ea typeface="Calibri" pitchFamily="34" charset="-122"/>
                 <a:cs typeface="Calibri" pitchFamily="34" charset="-120"/>
               </a:rPr>
-              <a:t>entry count</a:t>
+              <a:t>last block</a:t>
             </a:r>
             <a:endParaRPr lang="en-US" sz="1100" dirty="0"/>
           </a:p>
@@ -24520,14 +25485,14 @@
       </p:sp>
       <p:sp>
         <p:nvSpPr>
-          <p:cNvPr id="22" name="Text 20"/>
-          <p:cNvSpPr/>
-          <p:nvPr/>
-        </p:nvSpPr>
-        <p:spPr>
-          <a:xfrm>
-            <a:off x="3108960" y="5230368"/>
-            <a:ext cx="3054096" cy="347472"/>
+          <p:cNvPr id="24" name="Text 22"/>
+          <p:cNvSpPr/>
+          <p:nvPr/>
+        </p:nvSpPr>
+        <p:spPr>
+          <a:xfrm>
+            <a:off x="2331720" y="5632704"/>
+            <a:ext cx="2414016" cy="347472"/>
           </a:xfrm>
           <a:prstGeom prst="rect">
             <a:avLst/>
@@ -24549,7 +25514,7 @@
               <a:buNone/>
             </a:pPr>
             <a:r>
-              <a:rPr lang="en-US" sz="1050" dirty="0">
+              <a:rPr lang="en-US" sz="1100" dirty="0">
                 <a:solidFill>
                   <a:srgbClr val="000000"/>
                 </a:solidFill>
@@ -24557,217 +25522,9 @@
                 <a:ea typeface="Courier New" pitchFamily="34" charset="-122"/>
                 <a:cs typeface="Courier New" pitchFamily="34" charset="-120"/>
               </a:rPr>
-              <a:t>u64</a:t>
-            </a:r>
-            <a:endParaRPr lang="en-US" sz="1050" dirty="0"/>
-          </a:p>
-        </p:txBody>
-      </p:sp>
-      <p:sp>
-        <p:nvSpPr>
-          <p:cNvPr id="23" name="Text 21"/>
-          <p:cNvSpPr/>
-          <p:nvPr/>
-        </p:nvSpPr>
-        <p:spPr>
-          <a:xfrm>
-            <a:off x="1005840" y="5632704"/>
-            <a:ext cx="2103120" cy="347472"/>
-          </a:xfrm>
-          <a:prstGeom prst="rect">
-            <a:avLst/>
-          </a:prstGeom>
-          <a:solidFill>
-            <a:srgbClr val="F2F2F2"/>
-          </a:solidFill>
-          <a:ln w="6350">
-            <a:solidFill>
-              <a:srgbClr val="D9D9D9"/>
-            </a:solidFill>
-          </a:ln>
-        </p:spPr>
-        <p:txBody>
-          <a:bodyPr wrap="square" lIns="762" tIns="762" rIns="762" bIns="762" rtlCol="0" anchor="ctr"/>
-          <a:lstStyle/>
-          <a:p>
-            <a:pPr algn="l" indent="0" marL="0">
-              <a:buNone/>
-            </a:pPr>
-            <a:r>
-              <a:rPr lang="en-US" sz="1100" dirty="0">
-                <a:solidFill>
-                  <a:srgbClr val="000000"/>
-                </a:solidFill>
-                <a:latin typeface="Calibri" pitchFamily="34" charset="0"/>
-                <a:ea typeface="Calibri" pitchFamily="34" charset="-122"/>
-                <a:cs typeface="Calibri" pitchFamily="34" charset="-120"/>
-              </a:rPr>
-              <a:t>last block</a:t>
+              <a:t>4 (u32)</a:t>
             </a:r>
             <a:endParaRPr lang="en-US" sz="1100" dirty="0"/>
-          </a:p>
-        </p:txBody>
-      </p:sp>
-      <p:sp>
-        <p:nvSpPr>
-          <p:cNvPr id="24" name="Text 22"/>
-          <p:cNvSpPr/>
-          <p:nvPr/>
-        </p:nvSpPr>
-        <p:spPr>
-          <a:xfrm>
-            <a:off x="3108960" y="5632704"/>
-            <a:ext cx="3054096" cy="347472"/>
-          </a:xfrm>
-          <a:prstGeom prst="rect">
-            <a:avLst/>
-          </a:prstGeom>
-          <a:solidFill>
-            <a:srgbClr val="FFFFFF"/>
-          </a:solidFill>
-          <a:ln w="6350">
-            <a:solidFill>
-              <a:srgbClr val="D9D9D9"/>
-            </a:solidFill>
-          </a:ln>
-        </p:spPr>
-        <p:txBody>
-          <a:bodyPr wrap="square" lIns="762" tIns="762" rIns="762" bIns="762" rtlCol="0" anchor="ctr"/>
-          <a:lstStyle/>
-          <a:p>
-            <a:pPr algn="l" indent="0" marL="0">
-              <a:buNone/>
-            </a:pPr>
-            <a:r>
-              <a:rPr lang="en-US" sz="1050" dirty="0">
-                <a:solidFill>
-                  <a:srgbClr val="000000"/>
-                </a:solidFill>
-                <a:latin typeface="Courier New" pitchFamily="34" charset="0"/>
-                <a:ea typeface="Courier New" pitchFamily="34" charset="-122"/>
-                <a:cs typeface="Courier New" pitchFamily="34" charset="-120"/>
-              </a:rPr>
-              <a:t>u32 — dense allocation</a:t>
-            </a:r>
-            <a:endParaRPr lang="en-US" sz="1050" dirty="0"/>
-          </a:p>
-        </p:txBody>
-      </p:sp>
-      <p:sp>
-        <p:nvSpPr>
-          <p:cNvPr id="25" name="Text 23"/>
-          <p:cNvSpPr txBox="1"/>
-          <p:nvPr/>
-        </p:nvSpPr>
-        <p:spPr>
-          <a:xfrm>
-            <a:off x="6720840" y="1828800"/>
-            <a:ext cx="4617720" cy="4023360"/>
-          </a:xfrm>
-          <a:prstGeom prst="rect">
-            <a:avLst/>
-          </a:prstGeom>
-          <a:noFill/>
-          <a:ln/>
-        </p:spPr>
-        <p:txBody>
-          <a:bodyPr wrap="square" lIns="0" tIns="0" rIns="0" bIns="0" rtlCol="0" anchor="t"/>
-          <a:lstStyle/>
-          <a:p>
-            <a:pPr marL="152400" indent="-152400">
-              <a:lnSpc>
-                <a:spcPct val="104000"/>
-              </a:lnSpc>
-              <a:spcAft>
-                <a:spcPts val="1200"/>
-              </a:spcAft>
-              <a:buSzPct val="100000"/>
-              <a:buChar char="•"/>
-            </a:pPr>
-            <a:r>
-              <a:rPr lang="en-US" sz="1500" dirty="0">
-                <a:solidFill>
-                  <a:srgbClr val="000000"/>
-                </a:solidFill>
-                <a:latin typeface="Calibri" pitchFamily="34" charset="0"/>
-                <a:ea typeface="Calibri" pitchFamily="34" charset="-122"/>
-                <a:cs typeface="Calibri" pitchFamily="34" charset="-120"/>
-              </a:rPr>
-              <a:t>The file identifies itself: magic, key type and width, table and column names</a:t>
-            </a:r>
-            <a:endParaRPr lang="en-US" sz="1500" dirty="0"/>
-          </a:p>
-          <a:p>
-            <a:pPr marL="152400" indent="-152400">
-              <a:lnSpc>
-                <a:spcPct val="104000"/>
-              </a:lnSpc>
-              <a:spcAft>
-                <a:spcPts val="1200"/>
-              </a:spcAft>
-              <a:buSzPct val="100000"/>
-              <a:buChar char="•"/>
-            </a:pPr>
-            <a:r>
-              <a:rPr lang="en-US" sz="1500" dirty="0">
-                <a:solidFill>
-                  <a:srgbClr val="000000"/>
-                </a:solidFill>
-                <a:latin typeface="Calibri" pitchFamily="34" charset="0"/>
-                <a:ea typeface="Calibri" pitchFamily="34" charset="-122"/>
-                <a:cs typeface="Calibri" pitchFamily="34" charset="-120"/>
-              </a:rPr>
-              <a:t>open() validates all of it against the bound schema before use</a:t>
-            </a:r>
-            <a:endParaRPr lang="en-US" sz="1500" dirty="0"/>
-          </a:p>
-          <a:p>
-            <a:pPr marL="152400" indent="-152400">
-              <a:lnSpc>
-                <a:spcPct val="104000"/>
-              </a:lnSpc>
-              <a:spcAft>
-                <a:spcPts val="1200"/>
-              </a:spcAft>
-              <a:buSzPct val="100000"/>
-              <a:buChar char="•"/>
-            </a:pPr>
-            <a:r>
-              <a:rPr lang="en-US" sz="1500" dirty="0">
-                <a:solidFill>
-                  <a:srgbClr val="000000"/>
-                </a:solidFill>
-                <a:latin typeface="Calibri" pitchFamily="34" charset="0"/>
-                <a:ea typeface="Calibri" pitchFamily="34" charset="-122"/>
-                <a:cs typeface="Calibri" pitchFamily="34" charset="-120"/>
-              </a:rPr>
-              <a:t>write_header() runs after every insert — the entry count and last block move</a:t>
-            </a:r>
-            <a:endParaRPr lang="en-US" sz="1500" dirty="0"/>
-          </a:p>
-          <a:p>
-            <a:pPr marL="152400" indent="-152400">
-              <a:lnSpc>
-                <a:spcPct val="104000"/>
-              </a:lnSpc>
-              <a:spcAft>
-                <a:spcPts val="1200"/>
-              </a:spcAft>
-              <a:buSzPct val="100000"/>
-              <a:buChar char="•"/>
-            </a:pPr>
-            <a:r>
-              <a:rPr lang="en-US" sz="1500" dirty="0">
-                <a:solidFill>
-                  <a:srgbClr val="000000"/>
-                </a:solidFill>
-                <a:latin typeface="Calibri" pitchFamily="34" charset="0"/>
-                <a:ea typeface="Calibri" pitchFamily="34" charset="-122"/>
-                <a:cs typeface="Calibri" pitchFamily="34" charset="-120"/>
-              </a:rPr>
-              <a:t>A deleted index file is a lazy rebuild, not an error — the catalog says what should exist</a:t>
-            </a:r>
-            <a:endParaRPr lang="en-US" sz="1500" dirty="0"/>
           </a:p>
         </p:txBody>
       </p:sp>
@@ -24816,6 +25573,823 @@
               <a:t>5</a:t>
             </a:fld>
             <a:endParaRPr lang="en-US"/>
+          </a:p>
+        </p:txBody>
+      </p:sp>
+      <p:sp>
+        <p:nvSpPr>
+          <p:cNvPr id="26" name="Header root pointer horizontal"/>
+          <p:cNvSpPr/>
+          <p:nvPr/>
+        </p:nvSpPr>
+        <p:spPr>
+          <a:xfrm>
+            <a:off x="4745736" y="4197096"/>
+            <a:ext cx="603504" cy="0"/>
+          </a:xfrm>
+          <a:prstGeom prst="line">
+            <a:avLst/>
+          </a:prstGeom>
+          <a:noFill/>
+          <a:ln w="19050">
+            <a:solidFill>
+              <a:srgbClr val="2F5597"/>
+            </a:solidFill>
+          </a:ln>
+        </p:spPr>
+      </p:sp>
+      <p:sp>
+        <p:nvSpPr>
+          <p:cNvPr id="27" name="Header root pointer vertical"/>
+          <p:cNvSpPr/>
+          <p:nvPr/>
+        </p:nvSpPr>
+        <p:spPr>
+          <a:xfrm flipV="1">
+            <a:off x="5349240" y="2862072"/>
+            <a:ext cx="0" cy="1335024"/>
+          </a:xfrm>
+          <a:prstGeom prst="line">
+            <a:avLst/>
+          </a:prstGeom>
+          <a:noFill/>
+          <a:ln w="19050">
+            <a:solidFill>
+              <a:srgbClr val="2F5597"/>
+            </a:solidFill>
+          </a:ln>
+        </p:spPr>
+      </p:sp>
+      <p:sp>
+        <p:nvSpPr>
+          <p:cNvPr id="28" name="Header root pointer to block 4"/>
+          <p:cNvSpPr/>
+          <p:nvPr/>
+        </p:nvSpPr>
+        <p:spPr>
+          <a:xfrm>
+            <a:off x="5349240" y="2862072"/>
+            <a:ext cx="685800" cy="0"/>
+          </a:xfrm>
+          <a:prstGeom prst="line">
+            <a:avLst/>
+          </a:prstGeom>
+          <a:noFill/>
+          <a:ln w="19050">
+            <a:solidFill>
+              <a:srgbClr val="2F5597"/>
+            </a:solidFill>
+            <a:tailEnd type="triangle" w="sm" len="sm"/>
+          </a:ln>
+        </p:spPr>
+      </p:sp>
+      <p:sp>
+        <p:nvSpPr>
+          <p:cNvPr id="29" name="Root page title"/>
+          <p:cNvSpPr/>
+          <p:nvPr/>
+        </p:nvSpPr>
+        <p:spPr>
+          <a:xfrm>
+            <a:off x="6035040" y="1645920"/>
+            <a:ext cx="5212080" cy="365760"/>
+          </a:xfrm>
+          <a:prstGeom prst="rect">
+            <a:avLst/>
+          </a:prstGeom>
+          <a:noFill/>
+          <a:ln w="12700">
+            <a:noFill/>
+          </a:ln>
+        </p:spPr>
+        <p:txBody>
+          <a:bodyPr wrap="square" lIns="18288" rIns="18288" tIns="9144" bIns="9144" anchor="ctr"/>
+          <a:lstStyle/>
+          <a:p>
+            <a:pPr algn="ctr" marL="0" indent="0">
+              <a:buNone/>
+            </a:pPr>
+            <a:r>
+              <a:rPr lang="en-US" sz="1600" b="1">
+                <a:solidFill>
+                  <a:srgbClr val="2F5597"/>
+                </a:solidFill>
+                <a:latin typeface="Calibri"/>
+              </a:rPr>
+              <a:t>Root separator page, block 4</a:t>
+            </a:r>
+            <a:endParaRPr lang="en-US" sz="1600"/>
+          </a:p>
+        </p:txBody>
+      </p:sp>
+      <p:sp>
+        <p:nvSpPr>
+          <p:cNvPr id="30" name="Root contents explanation"/>
+          <p:cNvSpPr/>
+          <p:nvPr/>
+        </p:nvSpPr>
+        <p:spPr>
+          <a:xfrm>
+            <a:off x="6035040" y="2029968"/>
+            <a:ext cx="5212080" cy="310896"/>
+          </a:xfrm>
+          <a:prstGeom prst="rect">
+            <a:avLst/>
+          </a:prstGeom>
+          <a:noFill/>
+          <a:ln w="12700">
+            <a:noFill/>
+          </a:ln>
+        </p:spPr>
+        <p:txBody>
+          <a:bodyPr wrap="square" lIns="18288" rIns="18288" tIns="9144" bIns="9144" anchor="ctr"/>
+          <a:lstStyle/>
+          <a:p>
+            <a:pPr algn="ctr" marL="0" indent="0">
+              <a:buNone/>
+            </a:pPr>
+            <a:r>
+              <a:rPr lang="en-US" sz="1300" b="0">
+                <a:solidFill>
+                  <a:srgbClr val="2F5597"/>
+                </a:solidFill>
+                <a:latin typeface="Calibri"/>
+              </a:rPr>
+              <a:t>Keys and child pointers live in this page</a:t>
+            </a:r>
+            <a:endParaRPr lang="en-US" sz="1300"/>
+          </a:p>
+        </p:txBody>
+      </p:sp>
+      <p:sp>
+        <p:nvSpPr>
+          <p:cNvPr id="31" name="Root block 4 slot 0"/>
+          <p:cNvSpPr/>
+          <p:nvPr/>
+        </p:nvSpPr>
+        <p:spPr>
+          <a:xfrm>
+            <a:off x="6035040" y="2542032"/>
+            <a:ext cx="1042416" cy="640080"/>
+          </a:xfrm>
+          <a:prstGeom prst="rect">
+            <a:avLst/>
+          </a:prstGeom>
+          <a:solidFill>
+            <a:srgbClr val="DAE3F3"/>
+          </a:solidFill>
+          <a:ln w="12700">
+            <a:solidFill>
+              <a:srgbClr val="2F5597"/>
+            </a:solidFill>
+          </a:ln>
+        </p:spPr>
+        <p:txBody>
+          <a:bodyPr wrap="square" lIns="18288" rIns="18288" tIns="9144" bIns="9144" anchor="ctr"/>
+          <a:lstStyle/>
+          <a:p>
+            <a:pPr algn="ctr" marL="0" indent="0">
+              <a:buNone/>
+            </a:pPr>
+            <a:r>
+              <a:rPr lang="en-US" sz="1400" b="1">
+                <a:solidFill>
+                  <a:srgbClr val="2F5597"/>
+                </a:solidFill>
+                <a:latin typeface="Calibri"/>
+              </a:rPr>
+              <a:t>P0</a:t>
+            </a:r>
+            <a:endParaRPr lang="en-US" sz="1400"/>
+          </a:p>
+          <a:p>
+            <a:pPr algn="ctr" marL="0" indent="0">
+              <a:buNone/>
+            </a:pPr>
+            <a:r>
+              <a:rPr lang="en-US" sz="1400" b="1">
+                <a:solidFill>
+                  <a:srgbClr val="2F5597"/>
+                </a:solidFill>
+                <a:latin typeface="Calibri"/>
+              </a:rPr>
+              <a:t>block 1</a:t>
+            </a:r>
+            <a:endParaRPr lang="en-US" sz="1400"/>
+          </a:p>
+        </p:txBody>
+      </p:sp>
+      <p:sp>
+        <p:nvSpPr>
+          <p:cNvPr id="32" name="Root block 4 slot 1"/>
+          <p:cNvSpPr/>
+          <p:nvPr/>
+        </p:nvSpPr>
+        <p:spPr>
+          <a:xfrm>
+            <a:off x="7077456" y="2542032"/>
+            <a:ext cx="1042416" cy="640080"/>
+          </a:xfrm>
+          <a:prstGeom prst="rect">
+            <a:avLst/>
+          </a:prstGeom>
+          <a:solidFill>
+            <a:srgbClr val="FFFFFF"/>
+          </a:solidFill>
+          <a:ln w="12700">
+            <a:solidFill>
+              <a:srgbClr val="2F5597"/>
+            </a:solidFill>
+          </a:ln>
+        </p:spPr>
+        <p:txBody>
+          <a:bodyPr wrap="square" lIns="18288" rIns="18288" tIns="9144" bIns="9144" anchor="ctr"/>
+          <a:lstStyle/>
+          <a:p>
+            <a:pPr algn="ctr" marL="0" indent="0">
+              <a:buNone/>
+            </a:pPr>
+            <a:r>
+              <a:rPr lang="en-US" sz="1400" b="0">
+                <a:solidFill>
+                  <a:srgbClr val="2F5597"/>
+                </a:solidFill>
+                <a:latin typeface="Calibri"/>
+              </a:rPr>
+              <a:t>K1</a:t>
+            </a:r>
+            <a:endParaRPr lang="en-US" sz="1400"/>
+          </a:p>
+          <a:p>
+            <a:pPr algn="ctr" marL="0" indent="0">
+              <a:buNone/>
+            </a:pPr>
+            <a:r>
+              <a:rPr lang="en-US" sz="1400" b="0">
+                <a:solidFill>
+                  <a:srgbClr val="2F5597"/>
+                </a:solidFill>
+                <a:latin typeface="Calibri"/>
+              </a:rPr>
+              <a:t>341</a:t>
+            </a:r>
+            <a:endParaRPr lang="en-US" sz="1400"/>
+          </a:p>
+        </p:txBody>
+      </p:sp>
+      <p:sp>
+        <p:nvSpPr>
+          <p:cNvPr id="33" name="Root block 4 slot 2"/>
+          <p:cNvSpPr/>
+          <p:nvPr/>
+        </p:nvSpPr>
+        <p:spPr>
+          <a:xfrm>
+            <a:off x="8119872" y="2542032"/>
+            <a:ext cx="1042416" cy="640080"/>
+          </a:xfrm>
+          <a:prstGeom prst="rect">
+            <a:avLst/>
+          </a:prstGeom>
+          <a:solidFill>
+            <a:srgbClr val="DAE3F3"/>
+          </a:solidFill>
+          <a:ln w="12700">
+            <a:solidFill>
+              <a:srgbClr val="2F5597"/>
+            </a:solidFill>
+          </a:ln>
+        </p:spPr>
+        <p:txBody>
+          <a:bodyPr wrap="square" lIns="18288" rIns="18288" tIns="9144" bIns="9144" anchor="ctr"/>
+          <a:lstStyle/>
+          <a:p>
+            <a:pPr algn="ctr" marL="0" indent="0">
+              <a:buNone/>
+            </a:pPr>
+            <a:r>
+              <a:rPr lang="en-US" sz="1400" b="1">
+                <a:solidFill>
+                  <a:srgbClr val="2F5597"/>
+                </a:solidFill>
+                <a:latin typeface="Calibri"/>
+              </a:rPr>
+              <a:t>P1</a:t>
+            </a:r>
+            <a:endParaRPr lang="en-US" sz="1400"/>
+          </a:p>
+          <a:p>
+            <a:pPr algn="ctr" marL="0" indent="0">
+              <a:buNone/>
+            </a:pPr>
+            <a:r>
+              <a:rPr lang="en-US" sz="1400" b="1">
+                <a:solidFill>
+                  <a:srgbClr val="2F5597"/>
+                </a:solidFill>
+                <a:latin typeface="Calibri"/>
+              </a:rPr>
+              <a:t>block 2</a:t>
+            </a:r>
+            <a:endParaRPr lang="en-US" sz="1400"/>
+          </a:p>
+        </p:txBody>
+      </p:sp>
+      <p:sp>
+        <p:nvSpPr>
+          <p:cNvPr id="34" name="Root block 4 slot 3"/>
+          <p:cNvSpPr/>
+          <p:nvPr/>
+        </p:nvSpPr>
+        <p:spPr>
+          <a:xfrm>
+            <a:off x="9162288" y="2542032"/>
+            <a:ext cx="1042416" cy="640080"/>
+          </a:xfrm>
+          <a:prstGeom prst="rect">
+            <a:avLst/>
+          </a:prstGeom>
+          <a:solidFill>
+            <a:srgbClr val="FFFFFF"/>
+          </a:solidFill>
+          <a:ln w="12700">
+            <a:solidFill>
+              <a:srgbClr val="2F5597"/>
+            </a:solidFill>
+          </a:ln>
+        </p:spPr>
+        <p:txBody>
+          <a:bodyPr wrap="square" lIns="18288" rIns="18288" tIns="9144" bIns="9144" anchor="ctr"/>
+          <a:lstStyle/>
+          <a:p>
+            <a:pPr algn="ctr" marL="0" indent="0">
+              <a:buNone/>
+            </a:pPr>
+            <a:r>
+              <a:rPr lang="en-US" sz="1400" b="0">
+                <a:solidFill>
+                  <a:srgbClr val="2F5597"/>
+                </a:solidFill>
+                <a:latin typeface="Calibri"/>
+              </a:rPr>
+              <a:t>K2</a:t>
+            </a:r>
+            <a:endParaRPr lang="en-US" sz="1400"/>
+          </a:p>
+          <a:p>
+            <a:pPr algn="ctr" marL="0" indent="0">
+              <a:buNone/>
+            </a:pPr>
+            <a:r>
+              <a:rPr lang="en-US" sz="1400" b="0">
+                <a:solidFill>
+                  <a:srgbClr val="2F5597"/>
+                </a:solidFill>
+                <a:latin typeface="Calibri"/>
+              </a:rPr>
+              <a:t>681</a:t>
+            </a:r>
+            <a:endParaRPr lang="en-US" sz="1400"/>
+          </a:p>
+        </p:txBody>
+      </p:sp>
+      <p:sp>
+        <p:nvSpPr>
+          <p:cNvPr id="35" name="Root block 4 slot 4"/>
+          <p:cNvSpPr/>
+          <p:nvPr/>
+        </p:nvSpPr>
+        <p:spPr>
+          <a:xfrm>
+            <a:off x="10204704" y="2542032"/>
+            <a:ext cx="1042416" cy="640080"/>
+          </a:xfrm>
+          <a:prstGeom prst="rect">
+            <a:avLst/>
+          </a:prstGeom>
+          <a:solidFill>
+            <a:srgbClr val="DAE3F3"/>
+          </a:solidFill>
+          <a:ln w="12700">
+            <a:solidFill>
+              <a:srgbClr val="2F5597"/>
+            </a:solidFill>
+          </a:ln>
+        </p:spPr>
+        <p:txBody>
+          <a:bodyPr wrap="square" lIns="18288" rIns="18288" tIns="9144" bIns="9144" anchor="ctr"/>
+          <a:lstStyle/>
+          <a:p>
+            <a:pPr algn="ctr" marL="0" indent="0">
+              <a:buNone/>
+            </a:pPr>
+            <a:r>
+              <a:rPr lang="en-US" sz="1400" b="1">
+                <a:solidFill>
+                  <a:srgbClr val="2F5597"/>
+                </a:solidFill>
+                <a:latin typeface="Calibri"/>
+              </a:rPr>
+              <a:t>P2</a:t>
+            </a:r>
+            <a:endParaRPr lang="en-US" sz="1400"/>
+          </a:p>
+          <a:p>
+            <a:pPr algn="ctr" marL="0" indent="0">
+              <a:buNone/>
+            </a:pPr>
+            <a:r>
+              <a:rPr lang="en-US" sz="1400" b="1">
+                <a:solidFill>
+                  <a:srgbClr val="2F5597"/>
+                </a:solidFill>
+                <a:latin typeface="Calibri"/>
+              </a:rPr>
+              <a:t>block 3</a:t>
+            </a:r>
+            <a:endParaRPr lang="en-US" sz="1400"/>
+          </a:p>
+        </p:txBody>
+      </p:sp>
+      <p:sp>
+        <p:nvSpPr>
+          <p:cNvPr id="36" name="Root child pointer P0"/>
+          <p:cNvSpPr/>
+          <p:nvPr/>
+        </p:nvSpPr>
+        <p:spPr>
+          <a:xfrm>
+            <a:off x="6556248" y="3182112"/>
+            <a:ext cx="301752" cy="749808"/>
+          </a:xfrm>
+          <a:prstGeom prst="line">
+            <a:avLst/>
+          </a:prstGeom>
+          <a:noFill/>
+          <a:ln w="19050">
+            <a:solidFill>
+              <a:srgbClr val="2F5597"/>
+            </a:solidFill>
+            <a:tailEnd type="triangle" w="sm" len="sm"/>
+          </a:ln>
+        </p:spPr>
+      </p:sp>
+      <p:sp>
+        <p:nvSpPr>
+          <p:cNvPr id="37" name="Child leaf block 1"/>
+          <p:cNvSpPr/>
+          <p:nvPr/>
+        </p:nvSpPr>
+        <p:spPr>
+          <a:xfrm>
+            <a:off x="6035040" y="3931920"/>
+            <a:ext cx="1645920" cy="658368"/>
+          </a:xfrm>
+          <a:prstGeom prst="rect">
+            <a:avLst/>
+          </a:prstGeom>
+          <a:solidFill>
+            <a:srgbClr val="FBE5D6"/>
+          </a:solidFill>
+          <a:ln w="12700">
+            <a:solidFill>
+              <a:srgbClr val="C55A11"/>
+            </a:solidFill>
+          </a:ln>
+        </p:spPr>
+        <p:txBody>
+          <a:bodyPr wrap="square" lIns="18288" rIns="18288" tIns="9144" bIns="9144" anchor="ctr"/>
+          <a:lstStyle/>
+          <a:p>
+            <a:pPr algn="ctr" marL="0" indent="0">
+              <a:buNone/>
+            </a:pPr>
+            <a:r>
+              <a:rPr lang="en-US" sz="1200" b="0">
+                <a:solidFill>
+                  <a:srgbClr val="000000"/>
+                </a:solidFill>
+                <a:latin typeface="Calibri"/>
+              </a:rPr>
+              <a:t>Leaf block 1</a:t>
+            </a:r>
+            <a:endParaRPr lang="en-US" sz="1200"/>
+          </a:p>
+          <a:p>
+            <a:pPr algn="ctr" marL="0" indent="0">
+              <a:buNone/>
+            </a:pPr>
+            <a:r>
+              <a:rPr lang="en-US" sz="1200" b="0">
+                <a:solidFill>
+                  <a:srgbClr val="000000"/>
+                </a:solidFill>
+                <a:latin typeface="Calibri"/>
+              </a:rPr>
+              <a:t>keys 1–340</a:t>
+            </a:r>
+            <a:endParaRPr lang="en-US" sz="1200"/>
+          </a:p>
+        </p:txBody>
+      </p:sp>
+      <p:sp>
+        <p:nvSpPr>
+          <p:cNvPr id="38" name="Leaf next pointer 1"/>
+          <p:cNvSpPr/>
+          <p:nvPr/>
+        </p:nvSpPr>
+        <p:spPr>
+          <a:xfrm>
+            <a:off x="7680960" y="4261104"/>
+            <a:ext cx="137160" cy="0"/>
+          </a:xfrm>
+          <a:prstGeom prst="line">
+            <a:avLst/>
+          </a:prstGeom>
+          <a:noFill/>
+          <a:ln w="19050">
+            <a:solidFill>
+              <a:srgbClr val="C55A11"/>
+            </a:solidFill>
+            <a:tailEnd type="triangle" w="sm" len="sm"/>
+          </a:ln>
+        </p:spPr>
+      </p:sp>
+      <p:sp>
+        <p:nvSpPr>
+          <p:cNvPr id="39" name="Root child pointer P1"/>
+          <p:cNvSpPr/>
+          <p:nvPr/>
+        </p:nvSpPr>
+        <p:spPr>
+          <a:xfrm>
+            <a:off x="8641080" y="3182112"/>
+            <a:ext cx="0" cy="749808"/>
+          </a:xfrm>
+          <a:prstGeom prst="line">
+            <a:avLst/>
+          </a:prstGeom>
+          <a:noFill/>
+          <a:ln w="19050">
+            <a:solidFill>
+              <a:srgbClr val="2F5597"/>
+            </a:solidFill>
+            <a:tailEnd type="triangle" w="sm" len="sm"/>
+          </a:ln>
+        </p:spPr>
+      </p:sp>
+      <p:sp>
+        <p:nvSpPr>
+          <p:cNvPr id="40" name="Child leaf block 2"/>
+          <p:cNvSpPr/>
+          <p:nvPr/>
+        </p:nvSpPr>
+        <p:spPr>
+          <a:xfrm>
+            <a:off x="7818120" y="3931920"/>
+            <a:ext cx="1645920" cy="658368"/>
+          </a:xfrm>
+          <a:prstGeom prst="rect">
+            <a:avLst/>
+          </a:prstGeom>
+          <a:solidFill>
+            <a:srgbClr val="FBE5D6"/>
+          </a:solidFill>
+          <a:ln w="12700">
+            <a:solidFill>
+              <a:srgbClr val="C55A11"/>
+            </a:solidFill>
+          </a:ln>
+        </p:spPr>
+        <p:txBody>
+          <a:bodyPr wrap="square" lIns="18288" rIns="18288" tIns="9144" bIns="9144" anchor="ctr"/>
+          <a:lstStyle/>
+          <a:p>
+            <a:pPr algn="ctr" marL="0" indent="0">
+              <a:buNone/>
+            </a:pPr>
+            <a:r>
+              <a:rPr lang="en-US" sz="1200" b="0">
+                <a:solidFill>
+                  <a:srgbClr val="000000"/>
+                </a:solidFill>
+                <a:latin typeface="Calibri"/>
+              </a:rPr>
+              <a:t>Leaf block 2</a:t>
+            </a:r>
+            <a:endParaRPr lang="en-US" sz="1200"/>
+          </a:p>
+          <a:p>
+            <a:pPr algn="ctr" marL="0" indent="0">
+              <a:buNone/>
+            </a:pPr>
+            <a:r>
+              <a:rPr lang="en-US" sz="1200" b="0">
+                <a:solidFill>
+                  <a:srgbClr val="000000"/>
+                </a:solidFill>
+                <a:latin typeface="Calibri"/>
+              </a:rPr>
+              <a:t>keys 341–680</a:t>
+            </a:r>
+            <a:endParaRPr lang="en-US" sz="1200"/>
+          </a:p>
+        </p:txBody>
+      </p:sp>
+      <p:sp>
+        <p:nvSpPr>
+          <p:cNvPr id="41" name="Leaf next pointer 2"/>
+          <p:cNvSpPr/>
+          <p:nvPr/>
+        </p:nvSpPr>
+        <p:spPr>
+          <a:xfrm>
+            <a:off x="9464040" y="4261104"/>
+            <a:ext cx="137160" cy="0"/>
+          </a:xfrm>
+          <a:prstGeom prst="line">
+            <a:avLst/>
+          </a:prstGeom>
+          <a:noFill/>
+          <a:ln w="19050">
+            <a:solidFill>
+              <a:srgbClr val="C55A11"/>
+            </a:solidFill>
+            <a:tailEnd type="triangle" w="sm" len="sm"/>
+          </a:ln>
+        </p:spPr>
+      </p:sp>
+      <p:sp>
+        <p:nvSpPr>
+          <p:cNvPr id="42" name="Root child pointer P2"/>
+          <p:cNvSpPr/>
+          <p:nvPr/>
+        </p:nvSpPr>
+        <p:spPr>
+          <a:xfrm flipH="1">
+            <a:off x="10424160" y="3182112"/>
+            <a:ext cx="301752" cy="749808"/>
+          </a:xfrm>
+          <a:prstGeom prst="line">
+            <a:avLst/>
+          </a:prstGeom>
+          <a:noFill/>
+          <a:ln w="19050">
+            <a:solidFill>
+              <a:srgbClr val="2F5597"/>
+            </a:solidFill>
+            <a:tailEnd type="triangle" w="sm" len="sm"/>
+          </a:ln>
+        </p:spPr>
+      </p:sp>
+      <p:sp>
+        <p:nvSpPr>
+          <p:cNvPr id="43" name="Child leaf block 3"/>
+          <p:cNvSpPr/>
+          <p:nvPr/>
+        </p:nvSpPr>
+        <p:spPr>
+          <a:xfrm>
+            <a:off x="9601200" y="3931920"/>
+            <a:ext cx="1645920" cy="658368"/>
+          </a:xfrm>
+          <a:prstGeom prst="rect">
+            <a:avLst/>
+          </a:prstGeom>
+          <a:solidFill>
+            <a:srgbClr val="FBE5D6"/>
+          </a:solidFill>
+          <a:ln w="12700">
+            <a:solidFill>
+              <a:srgbClr val="C55A11"/>
+            </a:solidFill>
+          </a:ln>
+        </p:spPr>
+        <p:txBody>
+          <a:bodyPr wrap="square" lIns="18288" rIns="18288" tIns="9144" bIns="9144" anchor="ctr"/>
+          <a:lstStyle/>
+          <a:p>
+            <a:pPr algn="ctr" marL="0" indent="0">
+              <a:buNone/>
+            </a:pPr>
+            <a:r>
+              <a:rPr lang="en-US" sz="1200" b="0">
+                <a:solidFill>
+                  <a:srgbClr val="000000"/>
+                </a:solidFill>
+                <a:latin typeface="Calibri"/>
+              </a:rPr>
+              <a:t>Leaf block 3</a:t>
+            </a:r>
+            <a:endParaRPr lang="en-US" sz="1200"/>
+          </a:p>
+          <a:p>
+            <a:pPr algn="ctr" marL="0" indent="0">
+              <a:buNone/>
+            </a:pPr>
+            <a:r>
+              <a:rPr lang="en-US" sz="1200" b="0">
+                <a:solidFill>
+                  <a:srgbClr val="000000"/>
+                </a:solidFill>
+                <a:latin typeface="Calibri"/>
+              </a:rPr>
+              <a:t>keys 681–1000</a:t>
+            </a:r>
+            <a:endParaRPr lang="en-US" sz="1200"/>
+          </a:p>
+        </p:txBody>
+      </p:sp>
+      <p:sp>
+        <p:nvSpPr>
+          <p:cNvPr id="44" name="Root key and child count"/>
+          <p:cNvSpPr/>
+          <p:nvPr/>
+        </p:nvSpPr>
+        <p:spPr>
+          <a:xfrm>
+            <a:off x="6035040" y="4846320"/>
+            <a:ext cx="5212080" cy="365760"/>
+          </a:xfrm>
+          <a:prstGeom prst="rect">
+            <a:avLst/>
+          </a:prstGeom>
+          <a:noFill/>
+          <a:ln w="12700">
+            <a:noFill/>
+          </a:ln>
+        </p:spPr>
+        <p:txBody>
+          <a:bodyPr wrap="square" lIns="18288" rIns="18288" tIns="9144" bIns="9144" anchor="ctr"/>
+          <a:lstStyle/>
+          <a:p>
+            <a:pPr algn="ctr" marL="0" indent="0">
+              <a:buNone/>
+            </a:pPr>
+            <a:r>
+              <a:rPr lang="en-US" sz="1400" b="1">
+                <a:solidFill>
+                  <a:srgbClr val="2F5597"/>
+                </a:solidFill>
+                <a:latin typeface="Calibri"/>
+              </a:rPr>
+              <a:t>2 separator keys and 3 child pointers</a:t>
+            </a:r>
+            <a:endParaRPr lang="en-US" sz="1400"/>
+          </a:p>
+        </p:txBody>
+      </p:sp>
+      <p:sp>
+        <p:nvSpPr>
+          <p:cNvPr id="45" name="Header versus root explanation"/>
+          <p:cNvSpPr/>
+          <p:nvPr/>
+        </p:nvSpPr>
+        <p:spPr>
+          <a:xfrm>
+            <a:off x="6035040" y="5367528"/>
+            <a:ext cx="5212080" cy="594360"/>
+          </a:xfrm>
+          <a:prstGeom prst="rect">
+            <a:avLst/>
+          </a:prstGeom>
+          <a:noFill/>
+          <a:ln w="12700">
+            <a:noFill/>
+          </a:ln>
+        </p:spPr>
+        <p:txBody>
+          <a:bodyPr wrap="square" lIns="18288" rIns="18288" tIns="9144" bIns="9144" anchor="ctr"/>
+          <a:lstStyle/>
+          <a:p>
+            <a:pPr algn="l" marL="0" indent="0">
+              <a:buNone/>
+            </a:pPr>
+            <a:r>
+              <a:rPr lang="en-US" sz="1300" b="0">
+                <a:solidFill>
+                  <a:srgbClr val="000000"/>
+                </a:solidFill>
+                <a:latin typeface="Calibri"/>
+              </a:rPr>
+              <a:t>The header stores the root’s block number.</a:t>
+            </a:r>
+            <a:endParaRPr lang="en-US" sz="1300"/>
+          </a:p>
+          <a:p>
+            <a:pPr algn="l" marL="0" indent="0">
+              <a:buNone/>
+            </a:pPr>
+            <a:r>
+              <a:rPr lang="en-US" sz="1300" b="0">
+                <a:solidFill>
+                  <a:srgbClr val="000000"/>
+                </a:solidFill>
+                <a:latin typeface="Calibri"/>
+              </a:rPr>
+              <a:t>The root stores keys and pointers to child pages.</a:t>
+            </a:r>
+            <a:endParaRPr lang="en-US" sz="1300"/>
           </a:p>
         </p:txBody>
       </p:sp>
@@ -27868,7 +29442,7 @@
               <a:buNone/>
             </a:pPr>
             <a:r>
-              <a:rPr lang="en-US" sz="1150" i="1" dirty="0">
+              <a:rPr lang="en-US" sz="1100" i="1" dirty="0">
                 <a:solidFill>
                   <a:srgbClr val="595959"/>
                 </a:solidFill>
@@ -27876,201 +29450,13 @@
                 <a:ea typeface="Calibri" pitchFamily="34" charset="-122"/>
                 <a:cs typeface="Calibri" pitchFamily="34" charset="-120"/>
               </a:rPr>
-              <a:t>…link_leaf_chain links the chain — then each level is built from the first key of every page below — except the leftmost — until one page holds a level: the root</a:t>
-            </a:r>
-            <a:endParaRPr lang="en-US" sz="1150" dirty="0"/>
-          </a:p>
-        </p:txBody>
-      </p:sp>
-      <p:sp>
-        <p:nvSpPr>
-          <p:cNvPr id="24" name="Text 22"/>
-          <p:cNvSpPr/>
-          <p:nvPr/>
-        </p:nvSpPr>
-        <p:spPr>
-          <a:xfrm>
-            <a:off x="3383280" y="4800600"/>
-            <a:ext cx="4526280" cy="502920"/>
-          </a:xfrm>
-          <a:prstGeom prst="roundRect">
-            <a:avLst>
-              <a:gd name="adj" fmla="val 7273"/>
-            </a:avLst>
-          </a:prstGeom>
-          <a:solidFill>
-            <a:srgbClr val="DAE3F3"/>
-          </a:solidFill>
-          <a:ln w="15875">
-            <a:solidFill>
-              <a:srgbClr val="2F5597"/>
-            </a:solidFill>
-          </a:ln>
-        </p:spPr>
-        <p:txBody>
-          <a:bodyPr wrap="square" lIns="254" tIns="254" rIns="254" bIns="254" rtlCol="0" anchor="ctr"/>
-          <a:lstStyle/>
-          <a:p>
-            <a:pPr algn="ctr" indent="0" marL="0">
-              <a:buNone/>
-            </a:pPr>
-            <a:r>
-              <a:rPr lang="en-US" sz="1150" dirty="0">
-                <a:solidFill>
-                  <a:srgbClr val="000000"/>
-                </a:solidFill>
-                <a:latin typeface="Calibri" pitchFamily="34" charset="0"/>
-                <a:ea typeface="Calibri" pitchFamily="34" charset="-122"/>
-                <a:cs typeface="Calibri" pitchFamily="34" charset="-120"/>
-              </a:rPr>
-              <a:t>separator: 341 → L2 · 681 → L3 · first child L1</a:t>
-            </a:r>
-            <a:endParaRPr lang="en-US" sz="1150" dirty="0"/>
-          </a:p>
-        </p:txBody>
-      </p:sp>
-      <p:sp>
-        <p:nvSpPr>
-          <p:cNvPr id="25" name="Shape 23"/>
-          <p:cNvSpPr/>
-          <p:nvPr/>
-        </p:nvSpPr>
-        <p:spPr>
-          <a:xfrm>
-            <a:off x="3794760" y="3931920"/>
-            <a:ext cx="411480" cy="868680"/>
-          </a:xfrm>
-          <a:prstGeom prst="line">
-            <a:avLst/>
-          </a:prstGeom>
-          <a:noFill/>
-          <a:ln w="19050">
-            <a:solidFill>
-              <a:srgbClr val="2F5597"/>
-            </a:solidFill>
-            <a:prstDash val="dash"/>
-            <a:tailEnd type="triangle"/>
-          </a:ln>
-        </p:spPr>
-      </p:sp>
-      <p:sp>
-        <p:nvSpPr>
-          <p:cNvPr id="26" name="Shape 24"/>
-          <p:cNvSpPr/>
-          <p:nvPr/>
-        </p:nvSpPr>
-        <p:spPr>
-          <a:xfrm flipH="1">
-            <a:off x="5486400" y="3931920"/>
-            <a:ext cx="274320" cy="868680"/>
-          </a:xfrm>
-          <a:prstGeom prst="line">
-            <a:avLst/>
-          </a:prstGeom>
-          <a:noFill/>
-          <a:ln w="19050">
-            <a:solidFill>
-              <a:srgbClr val="2F5597"/>
-            </a:solidFill>
-            <a:prstDash val="dash"/>
-            <a:tailEnd type="triangle"/>
-          </a:ln>
-        </p:spPr>
-      </p:sp>
-      <p:sp>
-        <p:nvSpPr>
-          <p:cNvPr id="27" name="Shape 25"/>
-          <p:cNvSpPr/>
-          <p:nvPr/>
-        </p:nvSpPr>
-        <p:spPr>
-          <a:xfrm flipH="1">
-            <a:off x="6949440" y="3931920"/>
-            <a:ext cx="731520" cy="868680"/>
-          </a:xfrm>
-          <a:prstGeom prst="line">
-            <a:avLst/>
-          </a:prstGeom>
-          <a:noFill/>
-          <a:ln w="19050">
-            <a:solidFill>
-              <a:srgbClr val="2F5597"/>
-            </a:solidFill>
-            <a:prstDash val="dash"/>
-            <a:tailEnd type="triangle"/>
-          </a:ln>
-        </p:spPr>
-      </p:sp>
-      <p:sp>
-        <p:nvSpPr>
-          <p:cNvPr id="28" name="Text 26"/>
-          <p:cNvSpPr/>
-          <p:nvPr/>
-        </p:nvSpPr>
-        <p:spPr>
-          <a:xfrm>
-            <a:off x="5074920" y="5577840"/>
-            <a:ext cx="1143000" cy="457200"/>
-          </a:xfrm>
-          <a:prstGeom prst="roundRect">
-            <a:avLst>
-              <a:gd name="adj" fmla="val 8000"/>
-            </a:avLst>
-          </a:prstGeom>
-          <a:solidFill>
-            <a:srgbClr val="DAE3F3"/>
-          </a:solidFill>
-          <a:ln w="15875">
-            <a:solidFill>
-              <a:srgbClr val="2F5597"/>
-            </a:solidFill>
-          </a:ln>
-        </p:spPr>
-        <p:txBody>
-          <a:bodyPr wrap="square" lIns="254" tIns="254" rIns="254" bIns="254" rtlCol="0" anchor="ctr"/>
-          <a:lstStyle/>
-          <a:p>
-            <a:pPr algn="ctr" indent="0" marL="0">
-              <a:buNone/>
-            </a:pPr>
-            <a:r>
-              <a:rPr lang="en-US" sz="1200" b="1" dirty="0">
-                <a:solidFill>
-                  <a:srgbClr val="000000"/>
-                </a:solidFill>
-                <a:latin typeface="Calibri" pitchFamily="34" charset="0"/>
-                <a:ea typeface="Calibri" pitchFamily="34" charset="-122"/>
-                <a:cs typeface="Calibri" pitchFamily="34" charset="-120"/>
-              </a:rPr>
-              <a:t>root</a:t>
-            </a:r>
-            <a:endParaRPr lang="en-US" sz="1200" dirty="0"/>
-          </a:p>
-        </p:txBody>
-      </p:sp>
-      <p:sp>
-        <p:nvSpPr>
-          <p:cNvPr id="29" name="Shape 27"/>
-          <p:cNvSpPr/>
-          <p:nvPr/>
-        </p:nvSpPr>
-        <p:spPr>
-          <a:xfrm>
-            <a:off x="5650992" y="5303520"/>
-            <a:ext cx="0" cy="274320"/>
-          </a:xfrm>
-          <a:prstGeom prst="line">
-            <a:avLst/>
-          </a:prstGeom>
-          <a:noFill/>
-          <a:ln w="19050">
-            <a:solidFill>
-              <a:srgbClr val="2F5597"/>
-            </a:solidFill>
-            <a:prstDash val="solid"/>
-            <a:tailEnd type="triangle"/>
-          </a:ln>
-        </p:spPr>
+              <a:t>First keys 341 and 681 become separators.
+P0 names the first child.
+The root stores both keys and all three child pointers.</a:t>
+            </a:r>
+            <a:endParaRPr lang="en-US" sz="1100" dirty="0"/>
+          </a:p>
+        </p:txBody>
       </p:sp>
       <p:sp>
         <p:nvSpPr>
@@ -28283,6 +29669,332 @@
               <a:t>8</a:t>
             </a:fld>
             <a:endParaRPr lang="en-US"/>
+          </a:p>
+        </p:txBody>
+      </p:sp>
+      <p:sp>
+        <p:nvSpPr>
+          <p:cNvPr id="34" name="Built root slot 0"/>
+          <p:cNvSpPr/>
+          <p:nvPr/>
+        </p:nvSpPr>
+        <p:spPr>
+          <a:xfrm>
+            <a:off x="3749040" y="4800600"/>
+            <a:ext cx="822960" cy="502920"/>
+          </a:xfrm>
+          <a:prstGeom prst="rect">
+            <a:avLst/>
+          </a:prstGeom>
+          <a:solidFill>
+            <a:srgbClr val="DAE3F3"/>
+          </a:solidFill>
+          <a:ln w="12700">
+            <a:solidFill>
+              <a:srgbClr val="2F5597"/>
+            </a:solidFill>
+          </a:ln>
+        </p:spPr>
+        <p:txBody>
+          <a:bodyPr wrap="square" lIns="18288" rIns="18288" tIns="9144" bIns="9144" anchor="ctr"/>
+          <a:lstStyle/>
+          <a:p>
+            <a:pPr algn="ctr" marL="0" indent="0">
+              <a:buNone/>
+            </a:pPr>
+            <a:r>
+              <a:rPr lang="en-US" sz="1400" b="1">
+                <a:solidFill>
+                  <a:srgbClr val="2F5597"/>
+                </a:solidFill>
+                <a:latin typeface="Calibri"/>
+              </a:rPr>
+              <a:t>P0=1</a:t>
+            </a:r>
+            <a:endParaRPr lang="en-US" sz="1400"/>
+          </a:p>
+        </p:txBody>
+      </p:sp>
+      <p:sp>
+        <p:nvSpPr>
+          <p:cNvPr id="35" name="Built root slot 1"/>
+          <p:cNvSpPr/>
+          <p:nvPr/>
+        </p:nvSpPr>
+        <p:spPr>
+          <a:xfrm>
+            <a:off x="4572000" y="4800600"/>
+            <a:ext cx="822960" cy="502920"/>
+          </a:xfrm>
+          <a:prstGeom prst="rect">
+            <a:avLst/>
+          </a:prstGeom>
+          <a:solidFill>
+            <a:srgbClr val="FFFFFF"/>
+          </a:solidFill>
+          <a:ln w="12700">
+            <a:solidFill>
+              <a:srgbClr val="2F5597"/>
+            </a:solidFill>
+          </a:ln>
+        </p:spPr>
+        <p:txBody>
+          <a:bodyPr wrap="square" lIns="18288" rIns="18288" tIns="9144" bIns="9144" anchor="ctr"/>
+          <a:lstStyle/>
+          <a:p>
+            <a:pPr algn="ctr" marL="0" indent="0">
+              <a:buNone/>
+            </a:pPr>
+            <a:r>
+              <a:rPr lang="en-US" sz="1400" b="0">
+                <a:solidFill>
+                  <a:srgbClr val="2F5597"/>
+                </a:solidFill>
+                <a:latin typeface="Calibri"/>
+              </a:rPr>
+              <a:t>341</a:t>
+            </a:r>
+            <a:endParaRPr lang="en-US" sz="1400"/>
+          </a:p>
+        </p:txBody>
+      </p:sp>
+      <p:sp>
+        <p:nvSpPr>
+          <p:cNvPr id="36" name="Built root slot 2"/>
+          <p:cNvSpPr/>
+          <p:nvPr/>
+        </p:nvSpPr>
+        <p:spPr>
+          <a:xfrm>
+            <a:off x="5394960" y="4800600"/>
+            <a:ext cx="822960" cy="502920"/>
+          </a:xfrm>
+          <a:prstGeom prst="rect">
+            <a:avLst/>
+          </a:prstGeom>
+          <a:solidFill>
+            <a:srgbClr val="DAE3F3"/>
+          </a:solidFill>
+          <a:ln w="12700">
+            <a:solidFill>
+              <a:srgbClr val="2F5597"/>
+            </a:solidFill>
+          </a:ln>
+        </p:spPr>
+        <p:txBody>
+          <a:bodyPr wrap="square" lIns="18288" rIns="18288" tIns="9144" bIns="9144" anchor="ctr"/>
+          <a:lstStyle/>
+          <a:p>
+            <a:pPr algn="ctr" marL="0" indent="0">
+              <a:buNone/>
+            </a:pPr>
+            <a:r>
+              <a:rPr lang="en-US" sz="1400" b="1">
+                <a:solidFill>
+                  <a:srgbClr val="2F5597"/>
+                </a:solidFill>
+                <a:latin typeface="Calibri"/>
+              </a:rPr>
+              <a:t>P1=2</a:t>
+            </a:r>
+            <a:endParaRPr lang="en-US" sz="1400"/>
+          </a:p>
+        </p:txBody>
+      </p:sp>
+      <p:sp>
+        <p:nvSpPr>
+          <p:cNvPr id="37" name="Built root slot 3"/>
+          <p:cNvSpPr/>
+          <p:nvPr/>
+        </p:nvSpPr>
+        <p:spPr>
+          <a:xfrm>
+            <a:off x="6217920" y="4800600"/>
+            <a:ext cx="822960" cy="502920"/>
+          </a:xfrm>
+          <a:prstGeom prst="rect">
+            <a:avLst/>
+          </a:prstGeom>
+          <a:solidFill>
+            <a:srgbClr val="FFFFFF"/>
+          </a:solidFill>
+          <a:ln w="12700">
+            <a:solidFill>
+              <a:srgbClr val="2F5597"/>
+            </a:solidFill>
+          </a:ln>
+        </p:spPr>
+        <p:txBody>
+          <a:bodyPr wrap="square" lIns="18288" rIns="18288" tIns="9144" bIns="9144" anchor="ctr"/>
+          <a:lstStyle/>
+          <a:p>
+            <a:pPr algn="ctr" marL="0" indent="0">
+              <a:buNone/>
+            </a:pPr>
+            <a:r>
+              <a:rPr lang="en-US" sz="1400" b="0">
+                <a:solidFill>
+                  <a:srgbClr val="2F5597"/>
+                </a:solidFill>
+                <a:latin typeface="Calibri"/>
+              </a:rPr>
+              <a:t>681</a:t>
+            </a:r>
+            <a:endParaRPr lang="en-US" sz="1400"/>
+          </a:p>
+        </p:txBody>
+      </p:sp>
+      <p:sp>
+        <p:nvSpPr>
+          <p:cNvPr id="38" name="Built root slot 4"/>
+          <p:cNvSpPr/>
+          <p:nvPr/>
+        </p:nvSpPr>
+        <p:spPr>
+          <a:xfrm>
+            <a:off x="7040880" y="4800600"/>
+            <a:ext cx="822960" cy="502920"/>
+          </a:xfrm>
+          <a:prstGeom prst="rect">
+            <a:avLst/>
+          </a:prstGeom>
+          <a:solidFill>
+            <a:srgbClr val="DAE3F3"/>
+          </a:solidFill>
+          <a:ln w="12700">
+            <a:solidFill>
+              <a:srgbClr val="2F5597"/>
+            </a:solidFill>
+          </a:ln>
+        </p:spPr>
+        <p:txBody>
+          <a:bodyPr wrap="square" lIns="18288" rIns="18288" tIns="9144" bIns="9144" anchor="ctr"/>
+          <a:lstStyle/>
+          <a:p>
+            <a:pPr algn="ctr" marL="0" indent="0">
+              <a:buNone/>
+            </a:pPr>
+            <a:r>
+              <a:rPr lang="en-US" sz="1400" b="1">
+                <a:solidFill>
+                  <a:srgbClr val="2F5597"/>
+                </a:solidFill>
+                <a:latin typeface="Calibri"/>
+              </a:rPr>
+              <a:t>P2=3</a:t>
+            </a:r>
+            <a:endParaRPr lang="en-US" sz="1400"/>
+          </a:p>
+        </p:txBody>
+      </p:sp>
+      <p:sp>
+        <p:nvSpPr>
+          <p:cNvPr id="39" name="Leaf 1 root mapping"/>
+          <p:cNvSpPr/>
+          <p:nvPr/>
+        </p:nvSpPr>
+        <p:spPr>
+          <a:xfrm>
+            <a:off x="3771900" y="3931920"/>
+            <a:ext cx="388620" cy="868680"/>
+          </a:xfrm>
+          <a:prstGeom prst="line">
+            <a:avLst/>
+          </a:prstGeom>
+          <a:noFill/>
+          <a:ln w="19050">
+            <a:solidFill>
+              <a:srgbClr val="2F5597"/>
+            </a:solidFill>
+            <a:prstDash val="dash"/>
+            <a:tailEnd type="triangle" w="sm" len="sm"/>
+          </a:ln>
+        </p:spPr>
+      </p:sp>
+      <p:sp>
+        <p:nvSpPr>
+          <p:cNvPr id="40" name="Leaf 2 root mapping"/>
+          <p:cNvSpPr/>
+          <p:nvPr/>
+        </p:nvSpPr>
+        <p:spPr>
+          <a:xfrm>
+            <a:off x="5737860" y="3931920"/>
+            <a:ext cx="68580" cy="868680"/>
+          </a:xfrm>
+          <a:prstGeom prst="line">
+            <a:avLst/>
+          </a:prstGeom>
+          <a:noFill/>
+          <a:ln w="19050">
+            <a:solidFill>
+              <a:srgbClr val="2F5597"/>
+            </a:solidFill>
+            <a:prstDash val="dash"/>
+            <a:tailEnd type="triangle" w="sm" len="sm"/>
+          </a:ln>
+        </p:spPr>
+      </p:sp>
+      <p:sp>
+        <p:nvSpPr>
+          <p:cNvPr id="41" name="Leaf 3 root mapping"/>
+          <p:cNvSpPr/>
+          <p:nvPr/>
+        </p:nvSpPr>
+        <p:spPr>
+          <a:xfrm flipH="1">
+            <a:off x="7452360" y="3931920"/>
+            <a:ext cx="251460" cy="868680"/>
+          </a:xfrm>
+          <a:prstGeom prst="line">
+            <a:avLst/>
+          </a:prstGeom>
+          <a:noFill/>
+          <a:ln w="19050">
+            <a:solidFill>
+              <a:srgbClr val="2F5597"/>
+            </a:solidFill>
+            <a:prstDash val="dash"/>
+            <a:tailEnd type="triangle" w="sm" len="sm"/>
+          </a:ln>
+        </p:spPr>
+      </p:sp>
+      <p:sp>
+        <p:nvSpPr>
+          <p:cNvPr id="42" name="Built root heading"/>
+          <p:cNvSpPr/>
+          <p:nvPr/>
+        </p:nvSpPr>
+        <p:spPr>
+          <a:xfrm>
+            <a:off x="3474720" y="5541264"/>
+            <a:ext cx="4663440" cy="365760"/>
+          </a:xfrm>
+          <a:prstGeom prst="rect">
+            <a:avLst/>
+          </a:prstGeom>
+          <a:noFill/>
+          <a:ln w="12700">
+            <a:noFill/>
+          </a:ln>
+        </p:spPr>
+        <p:txBody>
+          <a:bodyPr wrap="square" lIns="18288" rIns="18288" tIns="9144" bIns="9144" anchor="ctr"/>
+          <a:lstStyle/>
+          <a:p>
+            <a:pPr algn="ctr" marL="0" indent="0">
+              <a:buNone/>
+            </a:pPr>
+            <a:r>
+              <a:rPr lang="en-US" sz="1400" b="1">
+                <a:solidFill>
+                  <a:srgbClr val="2F5597"/>
+                </a:solidFill>
+                <a:latin typeface="Calibri"/>
+              </a:rPr>
+              <a:t>Root block 4: 2 keys and 3 child pointers</a:t>
+            </a:r>
+            <a:endParaRPr lang="en-US" sz="1400"/>
           </a:p>
         </p:txBody>
       </p:sp>
@@ -28948,14 +30660,14 @@
       </p:sp>
       <p:sp>
         <p:nvSpPr>
-          <p:cNvPr id="20" name="Text 18"/>
-          <p:cNvSpPr/>
-          <p:nvPr/>
-        </p:nvSpPr>
-        <p:spPr>
-          <a:xfrm>
-            <a:off x="7863840" y="2011680"/>
-            <a:ext cx="1737360" cy="502920"/>
+          <p:cNvPr id="21" name="Text 19"/>
+          <p:cNvSpPr/>
+          <p:nvPr/>
+        </p:nvSpPr>
+        <p:spPr>
+          <a:xfrm>
+            <a:off x="6172200" y="3520440"/>
+            <a:ext cx="1554480" cy="502920"/>
           </a:xfrm>
           <a:prstGeom prst="roundRect">
             <a:avLst>
@@ -28963,11 +30675,11 @@
             </a:avLst>
           </a:prstGeom>
           <a:solidFill>
-            <a:srgbClr val="DAE3F3"/>
+            <a:srgbClr val="FBE5D6"/>
           </a:solidFill>
           <a:ln w="15875">
             <a:solidFill>
-              <a:srgbClr val="2F5597"/>
+              <a:srgbClr val="C55A11"/>
             </a:solidFill>
           </a:ln>
         </p:spPr>
@@ -28979,7 +30691,7 @@
               <a:buNone/>
             </a:pPr>
             <a:r>
-              <a:rPr lang="en-US" sz="1200" b="1" dirty="0">
+              <a:rPr lang="en-US" sz="1200" dirty="0">
                 <a:solidFill>
                   <a:srgbClr val="000000"/>
                 </a:solidFill>
@@ -28987,7 +30699,7 @@
                 <a:ea typeface="Calibri" pitchFamily="34" charset="-122"/>
                 <a:cs typeface="Calibri" pitchFamily="34" charset="-120"/>
               </a:rPr>
-              <a:t>block 4</a:t>
+              <a:t>1…340</a:t>
             </a:r>
             <a:endParaRPr lang="en-US" sz="1200" dirty="0"/>
           </a:p>
@@ -28995,13 +30707,13 @@
       </p:sp>
       <p:sp>
         <p:nvSpPr>
-          <p:cNvPr id="21" name="Text 19"/>
-          <p:cNvSpPr/>
-          <p:nvPr/>
-        </p:nvSpPr>
-        <p:spPr>
-          <a:xfrm>
-            <a:off x="6172200" y="3520440"/>
+          <p:cNvPr id="22" name="Text 20"/>
+          <p:cNvSpPr/>
+          <p:nvPr/>
+        </p:nvSpPr>
+        <p:spPr>
+          <a:xfrm>
+            <a:off x="7955280" y="3520440"/>
             <a:ext cx="1554480" cy="502920"/>
           </a:xfrm>
           <a:prstGeom prst="roundRect">
@@ -29034,7 +30746,7 @@
                 <a:ea typeface="Calibri" pitchFamily="34" charset="-122"/>
                 <a:cs typeface="Calibri" pitchFamily="34" charset="-120"/>
               </a:rPr>
-              <a:t>1…340</a:t>
+              <a:t>341…680</a:t>
             </a:r>
             <a:endParaRPr lang="en-US" sz="1200" dirty="0"/>
           </a:p>
@@ -29042,13 +30754,13 @@
       </p:sp>
       <p:sp>
         <p:nvSpPr>
-          <p:cNvPr id="22" name="Text 20"/>
-          <p:cNvSpPr/>
-          <p:nvPr/>
-        </p:nvSpPr>
-        <p:spPr>
-          <a:xfrm>
-            <a:off x="7955280" y="3520440"/>
+          <p:cNvPr id="23" name="Text 21"/>
+          <p:cNvSpPr/>
+          <p:nvPr/>
+        </p:nvSpPr>
+        <p:spPr>
+          <a:xfrm>
+            <a:off x="9738360" y="3520440"/>
             <a:ext cx="1554480" cy="502920"/>
           </a:xfrm>
           <a:prstGeom prst="roundRect">
@@ -29081,245 +30793,9 @@
                 <a:ea typeface="Calibri" pitchFamily="34" charset="-122"/>
                 <a:cs typeface="Calibri" pitchFamily="34" charset="-120"/>
               </a:rPr>
-              <a:t>341…680</a:t>
+              <a:t>681…1000</a:t>
             </a:r>
             <a:endParaRPr lang="en-US" sz="1200" dirty="0"/>
-          </a:p>
-        </p:txBody>
-      </p:sp>
-      <p:sp>
-        <p:nvSpPr>
-          <p:cNvPr id="23" name="Text 21"/>
-          <p:cNvSpPr/>
-          <p:nvPr/>
-        </p:nvSpPr>
-        <p:spPr>
-          <a:xfrm>
-            <a:off x="9738360" y="3520440"/>
-            <a:ext cx="1554480" cy="502920"/>
-          </a:xfrm>
-          <a:prstGeom prst="roundRect">
-            <a:avLst>
-              <a:gd name="adj" fmla="val 7273"/>
-            </a:avLst>
-          </a:prstGeom>
-          <a:solidFill>
-            <a:srgbClr val="FBE5D6"/>
-          </a:solidFill>
-          <a:ln w="15875">
-            <a:solidFill>
-              <a:srgbClr val="C55A11"/>
-            </a:solidFill>
-          </a:ln>
-        </p:spPr>
-        <p:txBody>
-          <a:bodyPr wrap="square" lIns="254" tIns="254" rIns="254" bIns="254" rtlCol="0" anchor="ctr"/>
-          <a:lstStyle/>
-          <a:p>
-            <a:pPr algn="ctr" indent="0" marL="0">
-              <a:buNone/>
-            </a:pPr>
-            <a:r>
-              <a:rPr lang="en-US" sz="1200" dirty="0">
-                <a:solidFill>
-                  <a:srgbClr val="000000"/>
-                </a:solidFill>
-                <a:latin typeface="Calibri" pitchFamily="34" charset="0"/>
-                <a:ea typeface="Calibri" pitchFamily="34" charset="-122"/>
-                <a:cs typeface="Calibri" pitchFamily="34" charset="-120"/>
-              </a:rPr>
-              <a:t>681…1000</a:t>
-            </a:r>
-            <a:endParaRPr lang="en-US" sz="1200" dirty="0"/>
-          </a:p>
-        </p:txBody>
-      </p:sp>
-      <p:sp>
-        <p:nvSpPr>
-          <p:cNvPr id="24" name="Shape 22"/>
-          <p:cNvSpPr/>
-          <p:nvPr/>
-        </p:nvSpPr>
-        <p:spPr>
-          <a:xfrm flipH="1">
-            <a:off x="7040880" y="2514600"/>
-            <a:ext cx="1371600" cy="1005840"/>
-          </a:xfrm>
-          <a:prstGeom prst="line">
-            <a:avLst/>
-          </a:prstGeom>
-          <a:noFill/>
-          <a:ln w="22225">
-            <a:solidFill>
-              <a:srgbClr val="2F5597"/>
-            </a:solidFill>
-            <a:prstDash val="solid"/>
-            <a:tailEnd type="triangle"/>
-          </a:ln>
-        </p:spPr>
-      </p:sp>
-      <p:sp>
-        <p:nvSpPr>
-          <p:cNvPr id="25" name="Shape 23"/>
-          <p:cNvSpPr/>
-          <p:nvPr/>
-        </p:nvSpPr>
-        <p:spPr>
-          <a:xfrm>
-            <a:off x="8732520" y="2514600"/>
-            <a:ext cx="0" cy="1005840"/>
-          </a:xfrm>
-          <a:prstGeom prst="line">
-            <a:avLst/>
-          </a:prstGeom>
-          <a:noFill/>
-          <a:ln w="22225">
-            <a:solidFill>
-              <a:srgbClr val="2F5597"/>
-            </a:solidFill>
-            <a:prstDash val="solid"/>
-            <a:tailEnd type="triangle"/>
-          </a:ln>
-        </p:spPr>
-      </p:sp>
-      <p:sp>
-        <p:nvSpPr>
-          <p:cNvPr id="26" name="Shape 24"/>
-          <p:cNvSpPr/>
-          <p:nvPr/>
-        </p:nvSpPr>
-        <p:spPr>
-          <a:xfrm>
-            <a:off x="9052560" y="2514600"/>
-            <a:ext cx="1371600" cy="1005840"/>
-          </a:xfrm>
-          <a:prstGeom prst="line">
-            <a:avLst/>
-          </a:prstGeom>
-          <a:noFill/>
-          <a:ln w="22225">
-            <a:solidFill>
-              <a:srgbClr val="2F5597"/>
-            </a:solidFill>
-            <a:prstDash val="solid"/>
-            <a:tailEnd type="triangle"/>
-          </a:ln>
-        </p:spPr>
-      </p:sp>
-      <p:sp>
-        <p:nvSpPr>
-          <p:cNvPr id="27" name="Text 25"/>
-          <p:cNvSpPr txBox="1"/>
-          <p:nvPr/>
-        </p:nvSpPr>
-        <p:spPr>
-          <a:xfrm>
-            <a:off x="7086600" y="2880360"/>
-            <a:ext cx="365760" cy="274320"/>
-          </a:xfrm>
-          <a:prstGeom prst="rect">
-            <a:avLst/>
-          </a:prstGeom>
-          <a:noFill/>
-          <a:ln/>
-        </p:spPr>
-        <p:txBody>
-          <a:bodyPr wrap="square" lIns="0" tIns="0" rIns="0" bIns="0" rtlCol="0" anchor="t"/>
-          <a:lstStyle/>
-          <a:p>
-            <a:pPr algn="l" indent="0" marL="0">
-              <a:buNone/>
-            </a:pPr>
-            <a:r>
-              <a:rPr lang="en-US" sz="1100" b="1" dirty="0">
-                <a:solidFill>
-                  <a:srgbClr val="2F5597"/>
-                </a:solidFill>
-                <a:latin typeface="Calibri" pitchFamily="34" charset="0"/>
-                <a:ea typeface="Calibri" pitchFamily="34" charset="-122"/>
-                <a:cs typeface="Calibri" pitchFamily="34" charset="-120"/>
-              </a:rPr>
-              <a:t>P0</a:t>
-            </a:r>
-            <a:endParaRPr lang="en-US" sz="1100" dirty="0"/>
-          </a:p>
-        </p:txBody>
-      </p:sp>
-      <p:sp>
-        <p:nvSpPr>
-          <p:cNvPr id="28" name="Text 26"/>
-          <p:cNvSpPr txBox="1"/>
-          <p:nvPr/>
-        </p:nvSpPr>
-        <p:spPr>
-          <a:xfrm>
-            <a:off x="8796528" y="2880360"/>
-            <a:ext cx="457200" cy="274320"/>
-          </a:xfrm>
-          <a:prstGeom prst="rect">
-            <a:avLst/>
-          </a:prstGeom>
-          <a:noFill/>
-          <a:ln/>
-        </p:spPr>
-        <p:txBody>
-          <a:bodyPr wrap="square" lIns="0" tIns="0" rIns="0" bIns="0" rtlCol="0" anchor="t"/>
-          <a:lstStyle/>
-          <a:p>
-            <a:pPr algn="l" indent="0" marL="0">
-              <a:buNone/>
-            </a:pPr>
-            <a:r>
-              <a:rPr lang="en-US" sz="1100" b="1" dirty="0">
-                <a:solidFill>
-                  <a:srgbClr val="2F5597"/>
-                </a:solidFill>
-                <a:latin typeface="Calibri" pitchFamily="34" charset="0"/>
-                <a:ea typeface="Calibri" pitchFamily="34" charset="-122"/>
-                <a:cs typeface="Calibri" pitchFamily="34" charset="-120"/>
-              </a:rPr>
-              <a:t>341</a:t>
-            </a:r>
-            <a:endParaRPr lang="en-US" sz="1100" dirty="0"/>
-          </a:p>
-        </p:txBody>
-      </p:sp>
-      <p:sp>
-        <p:nvSpPr>
-          <p:cNvPr id="29" name="Text 27"/>
-          <p:cNvSpPr txBox="1"/>
-          <p:nvPr/>
-        </p:nvSpPr>
-        <p:spPr>
-          <a:xfrm>
-            <a:off x="9829800" y="2880360"/>
-            <a:ext cx="457200" cy="274320"/>
-          </a:xfrm>
-          <a:prstGeom prst="rect">
-            <a:avLst/>
-          </a:prstGeom>
-          <a:noFill/>
-          <a:ln/>
-        </p:spPr>
-        <p:txBody>
-          <a:bodyPr wrap="square" lIns="0" tIns="0" rIns="0" bIns="0" rtlCol="0" anchor="t"/>
-          <a:lstStyle/>
-          <a:p>
-            <a:pPr algn="l" indent="0" marL="0">
-              <a:buNone/>
-            </a:pPr>
-            <a:r>
-              <a:rPr lang="en-US" sz="1100" b="1" dirty="0">
-                <a:solidFill>
-                  <a:srgbClr val="2F5597"/>
-                </a:solidFill>
-                <a:latin typeface="Calibri" pitchFamily="34" charset="0"/>
-                <a:ea typeface="Calibri" pitchFamily="34" charset="-122"/>
-                <a:cs typeface="Calibri" pitchFamily="34" charset="-120"/>
-              </a:rPr>
-              <a:t>681</a:t>
-            </a:r>
-            <a:endParaRPr lang="en-US" sz="1100" dirty="0"/>
           </a:p>
         </p:txBody>
       </p:sp>
@@ -29535,6 +31011,368 @@
               <a:t>9</a:t>
             </a:fld>
             <a:endParaRPr lang="en-US"/>
+          </a:p>
+        </p:txBody>
+      </p:sp>
+      <p:sp>
+        <p:nvSpPr>
+          <p:cNvPr id="35" name="Root page label"/>
+          <p:cNvSpPr/>
+          <p:nvPr/>
+        </p:nvSpPr>
+        <p:spPr>
+          <a:xfrm>
+            <a:off x="6492240" y="1883664"/>
+            <a:ext cx="4114800" cy="292608"/>
+          </a:xfrm>
+          <a:prstGeom prst="rect">
+            <a:avLst/>
+          </a:prstGeom>
+          <a:noFill/>
+          <a:ln w="12700">
+            <a:noFill/>
+          </a:ln>
+        </p:spPr>
+        <p:txBody>
+          <a:bodyPr wrap="square" lIns="18288" rIns="18288" tIns="9144" bIns="9144" anchor="ctr"/>
+          <a:lstStyle/>
+          <a:p>
+            <a:pPr algn="ctr" marL="0" indent="0">
+              <a:buNone/>
+            </a:pPr>
+            <a:r>
+              <a:rPr lang="en-US" sz="1400" b="1">
+                <a:solidFill>
+                  <a:srgbClr val="2F5597"/>
+                </a:solidFill>
+                <a:latin typeface="Calibri"/>
+              </a:rPr>
+              <a:t>Root separator, block 4</a:t>
+            </a:r>
+            <a:endParaRPr lang="en-US" sz="1400"/>
+          </a:p>
+        </p:txBody>
+      </p:sp>
+      <p:sp>
+        <p:nvSpPr>
+          <p:cNvPr id="36" name="Root layout slot 0"/>
+          <p:cNvSpPr/>
+          <p:nvPr/>
+        </p:nvSpPr>
+        <p:spPr>
+          <a:xfrm>
+            <a:off x="6492240" y="2267712"/>
+            <a:ext cx="822960" cy="530352"/>
+          </a:xfrm>
+          <a:prstGeom prst="rect">
+            <a:avLst/>
+          </a:prstGeom>
+          <a:solidFill>
+            <a:srgbClr val="DAE3F3"/>
+          </a:solidFill>
+          <a:ln w="12700">
+            <a:solidFill>
+              <a:srgbClr val="2F5597"/>
+            </a:solidFill>
+          </a:ln>
+        </p:spPr>
+        <p:txBody>
+          <a:bodyPr wrap="square" lIns="18288" rIns="18288" tIns="9144" bIns="9144" anchor="ctr"/>
+          <a:lstStyle/>
+          <a:p>
+            <a:pPr algn="ctr" marL="0" indent="0">
+              <a:buNone/>
+            </a:pPr>
+            <a:r>
+              <a:rPr lang="en-US" sz="1400" b="1">
+                <a:solidFill>
+                  <a:srgbClr val="2F5597"/>
+                </a:solidFill>
+                <a:latin typeface="Calibri"/>
+              </a:rPr>
+              <a:t>P0=1</a:t>
+            </a:r>
+            <a:endParaRPr lang="en-US" sz="1400"/>
+          </a:p>
+        </p:txBody>
+      </p:sp>
+      <p:sp>
+        <p:nvSpPr>
+          <p:cNvPr id="37" name="Root layout slot 1"/>
+          <p:cNvSpPr/>
+          <p:nvPr/>
+        </p:nvSpPr>
+        <p:spPr>
+          <a:xfrm>
+            <a:off x="7315200" y="2267712"/>
+            <a:ext cx="822960" cy="530352"/>
+          </a:xfrm>
+          <a:prstGeom prst="rect">
+            <a:avLst/>
+          </a:prstGeom>
+          <a:solidFill>
+            <a:srgbClr val="FFFFFF"/>
+          </a:solidFill>
+          <a:ln w="12700">
+            <a:solidFill>
+              <a:srgbClr val="2F5597"/>
+            </a:solidFill>
+          </a:ln>
+        </p:spPr>
+        <p:txBody>
+          <a:bodyPr wrap="square" lIns="18288" rIns="18288" tIns="9144" bIns="9144" anchor="ctr"/>
+          <a:lstStyle/>
+          <a:p>
+            <a:pPr algn="ctr" marL="0" indent="0">
+              <a:buNone/>
+            </a:pPr>
+            <a:r>
+              <a:rPr lang="en-US" sz="1400" b="0">
+                <a:solidFill>
+                  <a:srgbClr val="2F5597"/>
+                </a:solidFill>
+                <a:latin typeface="Calibri"/>
+              </a:rPr>
+              <a:t>341</a:t>
+            </a:r>
+            <a:endParaRPr lang="en-US" sz="1400"/>
+          </a:p>
+        </p:txBody>
+      </p:sp>
+      <p:sp>
+        <p:nvSpPr>
+          <p:cNvPr id="38" name="Root layout slot 2"/>
+          <p:cNvSpPr/>
+          <p:nvPr/>
+        </p:nvSpPr>
+        <p:spPr>
+          <a:xfrm>
+            <a:off x="8138160" y="2267712"/>
+            <a:ext cx="822960" cy="530352"/>
+          </a:xfrm>
+          <a:prstGeom prst="rect">
+            <a:avLst/>
+          </a:prstGeom>
+          <a:solidFill>
+            <a:srgbClr val="DAE3F3"/>
+          </a:solidFill>
+          <a:ln w="12700">
+            <a:solidFill>
+              <a:srgbClr val="2F5597"/>
+            </a:solidFill>
+          </a:ln>
+        </p:spPr>
+        <p:txBody>
+          <a:bodyPr wrap="square" lIns="18288" rIns="18288" tIns="9144" bIns="9144" anchor="ctr"/>
+          <a:lstStyle/>
+          <a:p>
+            <a:pPr algn="ctr" marL="0" indent="0">
+              <a:buNone/>
+            </a:pPr>
+            <a:r>
+              <a:rPr lang="en-US" sz="1400" b="1">
+                <a:solidFill>
+                  <a:srgbClr val="2F5597"/>
+                </a:solidFill>
+                <a:latin typeface="Calibri"/>
+              </a:rPr>
+              <a:t>P1=2</a:t>
+            </a:r>
+            <a:endParaRPr lang="en-US" sz="1400"/>
+          </a:p>
+        </p:txBody>
+      </p:sp>
+      <p:sp>
+        <p:nvSpPr>
+          <p:cNvPr id="39" name="Root layout slot 3"/>
+          <p:cNvSpPr/>
+          <p:nvPr/>
+        </p:nvSpPr>
+        <p:spPr>
+          <a:xfrm>
+            <a:off x="8961120" y="2267712"/>
+            <a:ext cx="822960" cy="530352"/>
+          </a:xfrm>
+          <a:prstGeom prst="rect">
+            <a:avLst/>
+          </a:prstGeom>
+          <a:solidFill>
+            <a:srgbClr val="FFFFFF"/>
+          </a:solidFill>
+          <a:ln w="12700">
+            <a:solidFill>
+              <a:srgbClr val="2F5597"/>
+            </a:solidFill>
+          </a:ln>
+        </p:spPr>
+        <p:txBody>
+          <a:bodyPr wrap="square" lIns="18288" rIns="18288" tIns="9144" bIns="9144" anchor="ctr"/>
+          <a:lstStyle/>
+          <a:p>
+            <a:pPr algn="ctr" marL="0" indent="0">
+              <a:buNone/>
+            </a:pPr>
+            <a:r>
+              <a:rPr lang="en-US" sz="1400" b="0">
+                <a:solidFill>
+                  <a:srgbClr val="2F5597"/>
+                </a:solidFill>
+                <a:latin typeface="Calibri"/>
+              </a:rPr>
+              <a:t>681</a:t>
+            </a:r>
+            <a:endParaRPr lang="en-US" sz="1400"/>
+          </a:p>
+        </p:txBody>
+      </p:sp>
+      <p:sp>
+        <p:nvSpPr>
+          <p:cNvPr id="40" name="Root layout slot 4"/>
+          <p:cNvSpPr/>
+          <p:nvPr/>
+        </p:nvSpPr>
+        <p:spPr>
+          <a:xfrm>
+            <a:off x="9784080" y="2267712"/>
+            <a:ext cx="822960" cy="530352"/>
+          </a:xfrm>
+          <a:prstGeom prst="rect">
+            <a:avLst/>
+          </a:prstGeom>
+          <a:solidFill>
+            <a:srgbClr val="DAE3F3"/>
+          </a:solidFill>
+          <a:ln w="12700">
+            <a:solidFill>
+              <a:srgbClr val="2F5597"/>
+            </a:solidFill>
+          </a:ln>
+        </p:spPr>
+        <p:txBody>
+          <a:bodyPr wrap="square" lIns="18288" rIns="18288" tIns="9144" bIns="9144" anchor="ctr"/>
+          <a:lstStyle/>
+          <a:p>
+            <a:pPr algn="ctr" marL="0" indent="0">
+              <a:buNone/>
+            </a:pPr>
+            <a:r>
+              <a:rPr lang="en-US" sz="1400" b="1">
+                <a:solidFill>
+                  <a:srgbClr val="2F5597"/>
+                </a:solidFill>
+                <a:latin typeface="Calibri"/>
+              </a:rPr>
+              <a:t>P2=3</a:t>
+            </a:r>
+            <a:endParaRPr lang="en-US" sz="1400"/>
+          </a:p>
+        </p:txBody>
+      </p:sp>
+      <p:sp>
+        <p:nvSpPr>
+          <p:cNvPr id="41" name="Root child block 1"/>
+          <p:cNvSpPr/>
+          <p:nvPr/>
+        </p:nvSpPr>
+        <p:spPr>
+          <a:xfrm>
+            <a:off x="6903720" y="2798064"/>
+            <a:ext cx="45720" cy="722376"/>
+          </a:xfrm>
+          <a:prstGeom prst="line">
+            <a:avLst/>
+          </a:prstGeom>
+          <a:noFill/>
+          <a:ln w="19050">
+            <a:solidFill>
+              <a:srgbClr val="2F5597"/>
+            </a:solidFill>
+            <a:tailEnd type="triangle" w="sm" len="sm"/>
+          </a:ln>
+        </p:spPr>
+      </p:sp>
+      <p:sp>
+        <p:nvSpPr>
+          <p:cNvPr id="42" name="Root child block 2"/>
+          <p:cNvSpPr/>
+          <p:nvPr/>
+        </p:nvSpPr>
+        <p:spPr>
+          <a:xfrm>
+            <a:off x="8549640" y="2798064"/>
+            <a:ext cx="182880" cy="722376"/>
+          </a:xfrm>
+          <a:prstGeom prst="line">
+            <a:avLst/>
+          </a:prstGeom>
+          <a:noFill/>
+          <a:ln w="19050">
+            <a:solidFill>
+              <a:srgbClr val="2F5597"/>
+            </a:solidFill>
+            <a:tailEnd type="triangle" w="sm" len="sm"/>
+          </a:ln>
+        </p:spPr>
+      </p:sp>
+      <p:sp>
+        <p:nvSpPr>
+          <p:cNvPr id="43" name="Root child block 3"/>
+          <p:cNvSpPr/>
+          <p:nvPr/>
+        </p:nvSpPr>
+        <p:spPr>
+          <a:xfrm>
+            <a:off x="10195560" y="2798064"/>
+            <a:ext cx="320040" cy="722376"/>
+          </a:xfrm>
+          <a:prstGeom prst="line">
+            <a:avLst/>
+          </a:prstGeom>
+          <a:noFill/>
+          <a:ln w="19050">
+            <a:solidFill>
+              <a:srgbClr val="2F5597"/>
+            </a:solidFill>
+            <a:tailEnd type="triangle" w="sm" len="sm"/>
+          </a:ln>
+        </p:spPr>
+      </p:sp>
+      <p:sp>
+        <p:nvSpPr>
+          <p:cNvPr id="44" name="Root key and pointer count"/>
+          <p:cNvSpPr/>
+          <p:nvPr/>
+        </p:nvSpPr>
+        <p:spPr>
+          <a:xfrm>
+            <a:off x="6263640" y="4590288"/>
+            <a:ext cx="5074920" cy="292608"/>
+          </a:xfrm>
+          <a:prstGeom prst="rect">
+            <a:avLst/>
+          </a:prstGeom>
+          <a:noFill/>
+          <a:ln w="12700">
+            <a:noFill/>
+          </a:ln>
+        </p:spPr>
+        <p:txBody>
+          <a:bodyPr wrap="square" lIns="18288" rIns="18288" tIns="9144" bIns="9144" anchor="ctr"/>
+          <a:lstStyle/>
+          <a:p>
+            <a:pPr algn="ctr" marL="0" indent="0">
+              <a:buNone/>
+            </a:pPr>
+            <a:r>
+              <a:rPr lang="en-US" sz="1400" b="0">
+                <a:solidFill>
+                  <a:srgbClr val="2F5597"/>
+                </a:solidFill>
+                <a:latin typeface="Calibri"/>
+              </a:rPr>
+              <a:t>2 separator keys and 3 child pointers</a:t>
+            </a:r>
+            <a:endParaRPr lang="en-US" sz="1400"/>
           </a:p>
         </p:txBody>
       </p:sp>
